--- a/8bit_MAC.pptx
+++ b/8bit_MAC.pptx
@@ -6,9 +6,10 @@
   </p:sldMasterIdLst>
   <p:sldIdLst>
     <p:sldId id="257" r:id="rId2"/>
-    <p:sldId id="260" r:id="rId3"/>
-    <p:sldId id="258" r:id="rId4"/>
-    <p:sldId id="259" r:id="rId5"/>
+    <p:sldId id="261" r:id="rId3"/>
+    <p:sldId id="260" r:id="rId4"/>
+    <p:sldId id="258" r:id="rId5"/>
+    <p:sldId id="259" r:id="rId6"/>
   </p:sldIdLst>
   <p:sldSz cx="12192000" cy="6858000"/>
   <p:notesSz cx="6858000" cy="9945688"/>
@@ -262,7 +263,7 @@
           <a:p>
             <a:fld id="{DEF78A9D-11A7-4529-9724-7005CF581704}" type="datetimeFigureOut">
               <a:rPr lang="ko-KR" altLang="en-US" smtClean="0"/>
-              <a:t>2026-05-27</a:t>
+              <a:t>2026-06-04</a:t>
             </a:fld>
             <a:endParaRPr lang="ko-KR" altLang="en-US"/>
           </a:p>
@@ -460,7 +461,7 @@
           <a:p>
             <a:fld id="{DEF78A9D-11A7-4529-9724-7005CF581704}" type="datetimeFigureOut">
               <a:rPr lang="ko-KR" altLang="en-US" smtClean="0"/>
-              <a:t>2026-05-27</a:t>
+              <a:t>2026-06-04</a:t>
             </a:fld>
             <a:endParaRPr lang="ko-KR" altLang="en-US"/>
           </a:p>
@@ -668,7 +669,7 @@
           <a:p>
             <a:fld id="{DEF78A9D-11A7-4529-9724-7005CF581704}" type="datetimeFigureOut">
               <a:rPr lang="ko-KR" altLang="en-US" smtClean="0"/>
-              <a:t>2026-05-27</a:t>
+              <a:t>2026-06-04</a:t>
             </a:fld>
             <a:endParaRPr lang="ko-KR" altLang="en-US"/>
           </a:p>
@@ -866,7 +867,7 @@
           <a:p>
             <a:fld id="{DEF78A9D-11A7-4529-9724-7005CF581704}" type="datetimeFigureOut">
               <a:rPr lang="ko-KR" altLang="en-US" smtClean="0"/>
-              <a:t>2026-05-27</a:t>
+              <a:t>2026-06-04</a:t>
             </a:fld>
             <a:endParaRPr lang="ko-KR" altLang="en-US"/>
           </a:p>
@@ -1141,7 +1142,7 @@
           <a:p>
             <a:fld id="{DEF78A9D-11A7-4529-9724-7005CF581704}" type="datetimeFigureOut">
               <a:rPr lang="ko-KR" altLang="en-US" smtClean="0"/>
-              <a:t>2026-05-27</a:t>
+              <a:t>2026-06-04</a:t>
             </a:fld>
             <a:endParaRPr lang="ko-KR" altLang="en-US"/>
           </a:p>
@@ -1406,7 +1407,7 @@
           <a:p>
             <a:fld id="{DEF78A9D-11A7-4529-9724-7005CF581704}" type="datetimeFigureOut">
               <a:rPr lang="ko-KR" altLang="en-US" smtClean="0"/>
-              <a:t>2026-05-27</a:t>
+              <a:t>2026-06-04</a:t>
             </a:fld>
             <a:endParaRPr lang="ko-KR" altLang="en-US"/>
           </a:p>
@@ -1818,7 +1819,7 @@
           <a:p>
             <a:fld id="{DEF78A9D-11A7-4529-9724-7005CF581704}" type="datetimeFigureOut">
               <a:rPr lang="ko-KR" altLang="en-US" smtClean="0"/>
-              <a:t>2026-05-27</a:t>
+              <a:t>2026-06-04</a:t>
             </a:fld>
             <a:endParaRPr lang="ko-KR" altLang="en-US"/>
           </a:p>
@@ -1959,7 +1960,7 @@
           <a:p>
             <a:fld id="{DEF78A9D-11A7-4529-9724-7005CF581704}" type="datetimeFigureOut">
               <a:rPr lang="ko-KR" altLang="en-US" smtClean="0"/>
-              <a:t>2026-05-27</a:t>
+              <a:t>2026-06-04</a:t>
             </a:fld>
             <a:endParaRPr lang="ko-KR" altLang="en-US"/>
           </a:p>
@@ -2072,7 +2073,7 @@
           <a:p>
             <a:fld id="{DEF78A9D-11A7-4529-9724-7005CF581704}" type="datetimeFigureOut">
               <a:rPr lang="ko-KR" altLang="en-US" smtClean="0"/>
-              <a:t>2026-05-27</a:t>
+              <a:t>2026-06-04</a:t>
             </a:fld>
             <a:endParaRPr lang="ko-KR" altLang="en-US"/>
           </a:p>
@@ -2383,7 +2384,7 @@
           <a:p>
             <a:fld id="{DEF78A9D-11A7-4529-9724-7005CF581704}" type="datetimeFigureOut">
               <a:rPr lang="ko-KR" altLang="en-US" smtClean="0"/>
-              <a:t>2026-05-27</a:t>
+              <a:t>2026-06-04</a:t>
             </a:fld>
             <a:endParaRPr lang="ko-KR" altLang="en-US"/>
           </a:p>
@@ -2671,7 +2672,7 @@
           <a:p>
             <a:fld id="{DEF78A9D-11A7-4529-9724-7005CF581704}" type="datetimeFigureOut">
               <a:rPr lang="ko-KR" altLang="en-US" smtClean="0"/>
-              <a:t>2026-05-27</a:t>
+              <a:t>2026-06-04</a:t>
             </a:fld>
             <a:endParaRPr lang="ko-KR" altLang="en-US"/>
           </a:p>
@@ -2912,7 +2913,7 @@
           <a:p>
             <a:fld id="{DEF78A9D-11A7-4529-9724-7005CF581704}" type="datetimeFigureOut">
               <a:rPr lang="ko-KR" altLang="en-US" smtClean="0"/>
-              <a:t>2026-05-27</a:t>
+              <a:t>2026-06-04</a:t>
             </a:fld>
             <a:endParaRPr lang="ko-KR" altLang="en-US"/>
           </a:p>
@@ -9335,6 +9336,4280 @@
         <p:cNvPr id="1" name="">
           <a:extLst>
             <a:ext uri="{FF2B5EF4-FFF2-40B4-BE49-F238E27FC236}">
+              <a16:creationId xmlns:a16="http://schemas.microsoft.com/office/drawing/2014/main" id="{B31E3145-7C69-4887-AD83-F0EDCEBBE573}"/>
+            </a:ext>
+          </a:extLst>
+        </p:cNvPr>
+        <p:cNvGrpSpPr/>
+        <p:nvPr/>
+      </p:nvGrpSpPr>
+      <p:grpSpPr>
+        <a:xfrm>
+          <a:off x="0" y="0"/>
+          <a:ext cx="0" cy="0"/>
+          <a:chOff x="0" y="0"/>
+          <a:chExt cx="0" cy="0"/>
+        </a:xfrm>
+      </p:grpSpPr>
+      <p:cxnSp>
+        <p:nvCxnSpPr>
+          <p:cNvPr id="124" name="연결선: 구부러짐 123">
+            <a:extLst>
+              <a:ext uri="{FF2B5EF4-FFF2-40B4-BE49-F238E27FC236}">
+                <a16:creationId xmlns:a16="http://schemas.microsoft.com/office/drawing/2014/main" id="{EA621C78-C75A-7689-18C2-7F494E03770A}"/>
+              </a:ext>
+            </a:extLst>
+          </p:cNvPr>
+          <p:cNvCxnSpPr>
+            <a:cxnSpLocks/>
+            <a:stCxn id="9" idx="3"/>
+            <a:endCxn id="107" idx="1"/>
+          </p:cNvCxnSpPr>
+          <p:nvPr/>
+        </p:nvCxnSpPr>
+        <p:spPr>
+          <a:xfrm>
+            <a:off x="5481995" y="2919087"/>
+            <a:ext cx="863600" cy="760517"/>
+          </a:xfrm>
+          <a:prstGeom prst="curvedConnector3">
+            <a:avLst>
+              <a:gd name="adj1" fmla="val 50000"/>
+            </a:avLst>
+          </a:prstGeom>
+          <a:ln w="12700">
+            <a:solidFill>
+              <a:schemeClr val="accent6">
+                <a:lumMod val="75000"/>
+              </a:schemeClr>
+            </a:solidFill>
+            <a:tailEnd type="triangle"/>
+          </a:ln>
+        </p:spPr>
+        <p:style>
+          <a:lnRef idx="2">
+            <a:schemeClr val="accent1"/>
+          </a:lnRef>
+          <a:fillRef idx="0">
+            <a:schemeClr val="accent1"/>
+          </a:fillRef>
+          <a:effectRef idx="1">
+            <a:schemeClr val="accent1"/>
+          </a:effectRef>
+          <a:fontRef idx="minor">
+            <a:schemeClr val="tx1"/>
+          </a:fontRef>
+        </p:style>
+      </p:cxnSp>
+      <p:cxnSp>
+        <p:nvCxnSpPr>
+          <p:cNvPr id="127" name="연결선: 구부러짐 126">
+            <a:extLst>
+              <a:ext uri="{FF2B5EF4-FFF2-40B4-BE49-F238E27FC236}">
+                <a16:creationId xmlns:a16="http://schemas.microsoft.com/office/drawing/2014/main" id="{C1BFF831-FBC6-29EA-F5A5-460FF2E54F3F}"/>
+              </a:ext>
+            </a:extLst>
+          </p:cNvPr>
+          <p:cNvCxnSpPr>
+            <a:cxnSpLocks/>
+            <a:stCxn id="10" idx="3"/>
+            <a:endCxn id="107" idx="1"/>
+          </p:cNvCxnSpPr>
+          <p:nvPr/>
+        </p:nvCxnSpPr>
+        <p:spPr>
+          <a:xfrm>
+            <a:off x="5481995" y="3525135"/>
+            <a:ext cx="863600" cy="154469"/>
+          </a:xfrm>
+          <a:prstGeom prst="curvedConnector3">
+            <a:avLst>
+              <a:gd name="adj1" fmla="val 50000"/>
+            </a:avLst>
+          </a:prstGeom>
+          <a:ln w="12700">
+            <a:solidFill>
+              <a:schemeClr val="accent6">
+                <a:lumMod val="75000"/>
+              </a:schemeClr>
+            </a:solidFill>
+            <a:tailEnd type="triangle"/>
+          </a:ln>
+        </p:spPr>
+        <p:style>
+          <a:lnRef idx="2">
+            <a:schemeClr val="accent1"/>
+          </a:lnRef>
+          <a:fillRef idx="0">
+            <a:schemeClr val="accent1"/>
+          </a:fillRef>
+          <a:effectRef idx="1">
+            <a:schemeClr val="accent1"/>
+          </a:effectRef>
+          <a:fontRef idx="minor">
+            <a:schemeClr val="tx1"/>
+          </a:fontRef>
+        </p:style>
+      </p:cxnSp>
+      <p:cxnSp>
+        <p:nvCxnSpPr>
+          <p:cNvPr id="130" name="연결선: 구부러짐 129">
+            <a:extLst>
+              <a:ext uri="{FF2B5EF4-FFF2-40B4-BE49-F238E27FC236}">
+                <a16:creationId xmlns:a16="http://schemas.microsoft.com/office/drawing/2014/main" id="{F6DA5AC1-E194-58BD-6C9B-F4181B2A3138}"/>
+              </a:ext>
+            </a:extLst>
+          </p:cNvPr>
+          <p:cNvCxnSpPr>
+            <a:cxnSpLocks/>
+            <a:stCxn id="11" idx="3"/>
+            <a:endCxn id="107" idx="1"/>
+          </p:cNvCxnSpPr>
+          <p:nvPr/>
+        </p:nvCxnSpPr>
+        <p:spPr>
+          <a:xfrm flipV="1">
+            <a:off x="5481995" y="3679604"/>
+            <a:ext cx="863600" cy="451579"/>
+          </a:xfrm>
+          <a:prstGeom prst="curvedConnector3">
+            <a:avLst>
+              <a:gd name="adj1" fmla="val 50000"/>
+            </a:avLst>
+          </a:prstGeom>
+          <a:ln w="12700">
+            <a:solidFill>
+              <a:schemeClr val="accent6">
+                <a:lumMod val="75000"/>
+              </a:schemeClr>
+            </a:solidFill>
+            <a:tailEnd type="triangle"/>
+          </a:ln>
+        </p:spPr>
+        <p:style>
+          <a:lnRef idx="2">
+            <a:schemeClr val="accent1"/>
+          </a:lnRef>
+          <a:fillRef idx="0">
+            <a:schemeClr val="accent1"/>
+          </a:fillRef>
+          <a:effectRef idx="1">
+            <a:schemeClr val="accent1"/>
+          </a:effectRef>
+          <a:fontRef idx="minor">
+            <a:schemeClr val="tx1"/>
+          </a:fontRef>
+        </p:style>
+      </p:cxnSp>
+      <p:cxnSp>
+        <p:nvCxnSpPr>
+          <p:cNvPr id="133" name="연결선: 구부러짐 132">
+            <a:extLst>
+              <a:ext uri="{FF2B5EF4-FFF2-40B4-BE49-F238E27FC236}">
+                <a16:creationId xmlns:a16="http://schemas.microsoft.com/office/drawing/2014/main" id="{6C349461-DF36-A96B-C3C8-F0BED28C3326}"/>
+              </a:ext>
+            </a:extLst>
+          </p:cNvPr>
+          <p:cNvCxnSpPr>
+            <a:cxnSpLocks/>
+            <a:stCxn id="12" idx="3"/>
+            <a:endCxn id="108" idx="1"/>
+          </p:cNvCxnSpPr>
+          <p:nvPr/>
+        </p:nvCxnSpPr>
+        <p:spPr>
+          <a:xfrm>
+            <a:off x="5481995" y="4737231"/>
+            <a:ext cx="863600" cy="720508"/>
+          </a:xfrm>
+          <a:prstGeom prst="curvedConnector3">
+            <a:avLst>
+              <a:gd name="adj1" fmla="val 50000"/>
+            </a:avLst>
+          </a:prstGeom>
+          <a:ln w="12700">
+            <a:solidFill>
+              <a:schemeClr val="accent6">
+                <a:lumMod val="75000"/>
+              </a:schemeClr>
+            </a:solidFill>
+            <a:tailEnd type="triangle"/>
+          </a:ln>
+        </p:spPr>
+        <p:style>
+          <a:lnRef idx="2">
+            <a:schemeClr val="accent1"/>
+          </a:lnRef>
+          <a:fillRef idx="0">
+            <a:schemeClr val="accent1"/>
+          </a:fillRef>
+          <a:effectRef idx="1">
+            <a:schemeClr val="accent1"/>
+          </a:effectRef>
+          <a:fontRef idx="minor">
+            <a:schemeClr val="tx1"/>
+          </a:fontRef>
+        </p:style>
+      </p:cxnSp>
+      <p:cxnSp>
+        <p:nvCxnSpPr>
+          <p:cNvPr id="136" name="연결선: 구부러짐 135">
+            <a:extLst>
+              <a:ext uri="{FF2B5EF4-FFF2-40B4-BE49-F238E27FC236}">
+                <a16:creationId xmlns:a16="http://schemas.microsoft.com/office/drawing/2014/main" id="{1965DE1E-D618-56A3-411E-163DD9349653}"/>
+              </a:ext>
+            </a:extLst>
+          </p:cNvPr>
+          <p:cNvCxnSpPr>
+            <a:cxnSpLocks/>
+            <a:stCxn id="13" idx="3"/>
+            <a:endCxn id="108" idx="1"/>
+          </p:cNvCxnSpPr>
+          <p:nvPr/>
+        </p:nvCxnSpPr>
+        <p:spPr>
+          <a:xfrm>
+            <a:off x="5481995" y="5343279"/>
+            <a:ext cx="863600" cy="114460"/>
+          </a:xfrm>
+          <a:prstGeom prst="curvedConnector3">
+            <a:avLst>
+              <a:gd name="adj1" fmla="val 50000"/>
+            </a:avLst>
+          </a:prstGeom>
+          <a:ln w="12700">
+            <a:solidFill>
+              <a:schemeClr val="accent6">
+                <a:lumMod val="75000"/>
+              </a:schemeClr>
+            </a:solidFill>
+            <a:tailEnd type="triangle"/>
+          </a:ln>
+        </p:spPr>
+        <p:style>
+          <a:lnRef idx="2">
+            <a:schemeClr val="accent1"/>
+          </a:lnRef>
+          <a:fillRef idx="0">
+            <a:schemeClr val="accent1"/>
+          </a:fillRef>
+          <a:effectRef idx="1">
+            <a:schemeClr val="accent1"/>
+          </a:effectRef>
+          <a:fontRef idx="minor">
+            <a:schemeClr val="tx1"/>
+          </a:fontRef>
+        </p:style>
+      </p:cxnSp>
+      <p:cxnSp>
+        <p:nvCxnSpPr>
+          <p:cNvPr id="139" name="연결선: 구부러짐 138">
+            <a:extLst>
+              <a:ext uri="{FF2B5EF4-FFF2-40B4-BE49-F238E27FC236}">
+                <a16:creationId xmlns:a16="http://schemas.microsoft.com/office/drawing/2014/main" id="{5CCD3E5E-8B53-97C9-4E35-57F6B21AA739}"/>
+              </a:ext>
+            </a:extLst>
+          </p:cNvPr>
+          <p:cNvCxnSpPr>
+            <a:cxnSpLocks/>
+            <a:stCxn id="14" idx="3"/>
+            <a:endCxn id="108" idx="1"/>
+          </p:cNvCxnSpPr>
+          <p:nvPr/>
+        </p:nvCxnSpPr>
+        <p:spPr>
+          <a:xfrm flipV="1">
+            <a:off x="5481995" y="5457739"/>
+            <a:ext cx="863600" cy="491588"/>
+          </a:xfrm>
+          <a:prstGeom prst="curvedConnector3">
+            <a:avLst>
+              <a:gd name="adj1" fmla="val 50000"/>
+            </a:avLst>
+          </a:prstGeom>
+          <a:ln w="12700">
+            <a:solidFill>
+              <a:schemeClr val="accent6">
+                <a:lumMod val="75000"/>
+              </a:schemeClr>
+            </a:solidFill>
+            <a:tailEnd type="triangle"/>
+          </a:ln>
+        </p:spPr>
+        <p:style>
+          <a:lnRef idx="2">
+            <a:schemeClr val="accent1"/>
+          </a:lnRef>
+          <a:fillRef idx="0">
+            <a:schemeClr val="accent1"/>
+          </a:fillRef>
+          <a:effectRef idx="1">
+            <a:schemeClr val="accent1"/>
+          </a:effectRef>
+          <a:fontRef idx="minor">
+            <a:schemeClr val="tx1"/>
+          </a:fontRef>
+        </p:style>
+      </p:cxnSp>
+      <p:cxnSp>
+        <p:nvCxnSpPr>
+          <p:cNvPr id="115" name="연결선: 구부러짐 114">
+            <a:extLst>
+              <a:ext uri="{FF2B5EF4-FFF2-40B4-BE49-F238E27FC236}">
+                <a16:creationId xmlns:a16="http://schemas.microsoft.com/office/drawing/2014/main" id="{2ECEAA01-BAC2-78B5-4E61-94627AA4662F}"/>
+              </a:ext>
+            </a:extLst>
+          </p:cNvPr>
+          <p:cNvCxnSpPr>
+            <a:cxnSpLocks/>
+            <a:stCxn id="6" idx="3"/>
+            <a:endCxn id="106" idx="1"/>
+          </p:cNvCxnSpPr>
+          <p:nvPr/>
+        </p:nvCxnSpPr>
+        <p:spPr>
+          <a:xfrm>
+            <a:off x="5481995" y="1100943"/>
+            <a:ext cx="863600" cy="800526"/>
+          </a:xfrm>
+          <a:prstGeom prst="curvedConnector3">
+            <a:avLst>
+              <a:gd name="adj1" fmla="val 50000"/>
+            </a:avLst>
+          </a:prstGeom>
+          <a:ln w="12700">
+            <a:solidFill>
+              <a:schemeClr val="accent6">
+                <a:lumMod val="75000"/>
+              </a:schemeClr>
+            </a:solidFill>
+            <a:tailEnd type="triangle"/>
+          </a:ln>
+        </p:spPr>
+        <p:style>
+          <a:lnRef idx="2">
+            <a:schemeClr val="accent1"/>
+          </a:lnRef>
+          <a:fillRef idx="0">
+            <a:schemeClr val="accent1"/>
+          </a:fillRef>
+          <a:effectRef idx="1">
+            <a:schemeClr val="accent1"/>
+          </a:effectRef>
+          <a:fontRef idx="minor">
+            <a:schemeClr val="tx1"/>
+          </a:fontRef>
+        </p:style>
+      </p:cxnSp>
+      <p:cxnSp>
+        <p:nvCxnSpPr>
+          <p:cNvPr id="118" name="연결선: 구부러짐 117">
+            <a:extLst>
+              <a:ext uri="{FF2B5EF4-FFF2-40B4-BE49-F238E27FC236}">
+                <a16:creationId xmlns:a16="http://schemas.microsoft.com/office/drawing/2014/main" id="{6E8400B5-E949-DEBC-CFFE-30860BCA046A}"/>
+              </a:ext>
+            </a:extLst>
+          </p:cNvPr>
+          <p:cNvCxnSpPr>
+            <a:cxnSpLocks/>
+            <a:stCxn id="7" idx="3"/>
+            <a:endCxn id="106" idx="1"/>
+          </p:cNvCxnSpPr>
+          <p:nvPr/>
+        </p:nvCxnSpPr>
+        <p:spPr>
+          <a:xfrm>
+            <a:off x="5481995" y="1706991"/>
+            <a:ext cx="863600" cy="194478"/>
+          </a:xfrm>
+          <a:prstGeom prst="curvedConnector3">
+            <a:avLst>
+              <a:gd name="adj1" fmla="val 50000"/>
+            </a:avLst>
+          </a:prstGeom>
+          <a:ln w="12700">
+            <a:solidFill>
+              <a:schemeClr val="accent6">
+                <a:lumMod val="75000"/>
+              </a:schemeClr>
+            </a:solidFill>
+            <a:tailEnd type="triangle"/>
+          </a:ln>
+        </p:spPr>
+        <p:style>
+          <a:lnRef idx="2">
+            <a:schemeClr val="accent1"/>
+          </a:lnRef>
+          <a:fillRef idx="0">
+            <a:schemeClr val="accent1"/>
+          </a:fillRef>
+          <a:effectRef idx="1">
+            <a:schemeClr val="accent1"/>
+          </a:effectRef>
+          <a:fontRef idx="minor">
+            <a:schemeClr val="tx1"/>
+          </a:fontRef>
+        </p:style>
+      </p:cxnSp>
+      <p:cxnSp>
+        <p:nvCxnSpPr>
+          <p:cNvPr id="121" name="연결선: 구부러짐 120">
+            <a:extLst>
+              <a:ext uri="{FF2B5EF4-FFF2-40B4-BE49-F238E27FC236}">
+                <a16:creationId xmlns:a16="http://schemas.microsoft.com/office/drawing/2014/main" id="{DF95C3C2-39C9-6FA4-CF42-D3BABEE575BE}"/>
+              </a:ext>
+            </a:extLst>
+          </p:cNvPr>
+          <p:cNvCxnSpPr>
+            <a:cxnSpLocks/>
+            <a:stCxn id="8" idx="3"/>
+            <a:endCxn id="106" idx="1"/>
+          </p:cNvCxnSpPr>
+          <p:nvPr/>
+        </p:nvCxnSpPr>
+        <p:spPr>
+          <a:xfrm flipV="1">
+            <a:off x="5481995" y="1901469"/>
+            <a:ext cx="863600" cy="411570"/>
+          </a:xfrm>
+          <a:prstGeom prst="curvedConnector3">
+            <a:avLst>
+              <a:gd name="adj1" fmla="val 50000"/>
+            </a:avLst>
+          </a:prstGeom>
+          <a:ln w="12700">
+            <a:solidFill>
+              <a:schemeClr val="accent6">
+                <a:lumMod val="75000"/>
+              </a:schemeClr>
+            </a:solidFill>
+            <a:tailEnd type="triangle"/>
+          </a:ln>
+        </p:spPr>
+        <p:style>
+          <a:lnRef idx="2">
+            <a:schemeClr val="accent1"/>
+          </a:lnRef>
+          <a:fillRef idx="0">
+            <a:schemeClr val="accent1"/>
+          </a:fillRef>
+          <a:effectRef idx="1">
+            <a:schemeClr val="accent1"/>
+          </a:effectRef>
+          <a:fontRef idx="minor">
+            <a:schemeClr val="tx1"/>
+          </a:fontRef>
+        </p:style>
+      </p:cxnSp>
+      <p:cxnSp>
+        <p:nvCxnSpPr>
+          <p:cNvPr id="93" name="연결선: 구부러짐 92">
+            <a:extLst>
+              <a:ext uri="{FF2B5EF4-FFF2-40B4-BE49-F238E27FC236}">
+                <a16:creationId xmlns:a16="http://schemas.microsoft.com/office/drawing/2014/main" id="{E05E9B74-F80D-EC18-D740-8F98DD8D2B54}"/>
+              </a:ext>
+            </a:extLst>
+          </p:cNvPr>
+          <p:cNvCxnSpPr>
+            <a:cxnSpLocks/>
+            <a:stCxn id="5" idx="3"/>
+            <a:endCxn id="21" idx="1"/>
+          </p:cNvCxnSpPr>
+          <p:nvPr/>
+        </p:nvCxnSpPr>
+        <p:spPr>
+          <a:xfrm>
+            <a:off x="4212590" y="3556794"/>
+            <a:ext cx="1180505" cy="271365"/>
+          </a:xfrm>
+          <a:prstGeom prst="curvedConnector3">
+            <a:avLst>
+              <a:gd name="adj1" fmla="val 50000"/>
+            </a:avLst>
+          </a:prstGeom>
+          <a:ln w="12700">
+            <a:solidFill>
+              <a:schemeClr val="accent2"/>
+            </a:solidFill>
+            <a:tailEnd type="triangle"/>
+          </a:ln>
+        </p:spPr>
+        <p:style>
+          <a:lnRef idx="2">
+            <a:schemeClr val="accent1"/>
+          </a:lnRef>
+          <a:fillRef idx="0">
+            <a:schemeClr val="accent1"/>
+          </a:fillRef>
+          <a:effectRef idx="1">
+            <a:schemeClr val="accent1"/>
+          </a:effectRef>
+          <a:fontRef idx="minor">
+            <a:schemeClr val="tx1"/>
+          </a:fontRef>
+        </p:style>
+      </p:cxnSp>
+      <p:cxnSp>
+        <p:nvCxnSpPr>
+          <p:cNvPr id="66" name="연결선: 구부러짐 65">
+            <a:extLst>
+              <a:ext uri="{FF2B5EF4-FFF2-40B4-BE49-F238E27FC236}">
+                <a16:creationId xmlns:a16="http://schemas.microsoft.com/office/drawing/2014/main" id="{6F00D5A1-A0EE-5B6C-61A2-08776925BDFE}"/>
+              </a:ext>
+            </a:extLst>
+          </p:cNvPr>
+          <p:cNvCxnSpPr>
+            <a:cxnSpLocks/>
+            <a:stCxn id="5" idx="3"/>
+            <a:endCxn id="17" idx="1"/>
+          </p:cNvCxnSpPr>
+          <p:nvPr/>
+        </p:nvCxnSpPr>
+        <p:spPr>
+          <a:xfrm flipV="1">
+            <a:off x="4212590" y="1403967"/>
+            <a:ext cx="1180505" cy="2152827"/>
+          </a:xfrm>
+          <a:prstGeom prst="curvedConnector3">
+            <a:avLst>
+              <a:gd name="adj1" fmla="val 50000"/>
+            </a:avLst>
+          </a:prstGeom>
+          <a:ln w="12700">
+            <a:solidFill>
+              <a:schemeClr val="accent2"/>
+            </a:solidFill>
+            <a:tailEnd type="triangle"/>
+          </a:ln>
+        </p:spPr>
+        <p:style>
+          <a:lnRef idx="2">
+            <a:schemeClr val="accent1"/>
+          </a:lnRef>
+          <a:fillRef idx="0">
+            <a:schemeClr val="accent1"/>
+          </a:fillRef>
+          <a:effectRef idx="1">
+            <a:schemeClr val="accent1"/>
+          </a:effectRef>
+          <a:fontRef idx="minor">
+            <a:schemeClr val="tx1"/>
+          </a:fontRef>
+        </p:style>
+      </p:cxnSp>
+      <p:cxnSp>
+        <p:nvCxnSpPr>
+          <p:cNvPr id="69" name="연결선: 구부러짐 68">
+            <a:extLst>
+              <a:ext uri="{FF2B5EF4-FFF2-40B4-BE49-F238E27FC236}">
+                <a16:creationId xmlns:a16="http://schemas.microsoft.com/office/drawing/2014/main" id="{71FE9909-2464-0C8E-D8EB-B7FF0A14E9F8}"/>
+              </a:ext>
+            </a:extLst>
+          </p:cNvPr>
+          <p:cNvCxnSpPr>
+            <a:cxnSpLocks/>
+            <a:stCxn id="5" idx="3"/>
+            <a:endCxn id="18" idx="1"/>
+          </p:cNvCxnSpPr>
+          <p:nvPr/>
+        </p:nvCxnSpPr>
+        <p:spPr>
+          <a:xfrm flipV="1">
+            <a:off x="4212590" y="2010015"/>
+            <a:ext cx="1180505" cy="1546779"/>
+          </a:xfrm>
+          <a:prstGeom prst="curvedConnector3">
+            <a:avLst>
+              <a:gd name="adj1" fmla="val 50000"/>
+            </a:avLst>
+          </a:prstGeom>
+          <a:ln w="12700">
+            <a:solidFill>
+              <a:schemeClr val="accent2"/>
+            </a:solidFill>
+            <a:tailEnd type="triangle"/>
+          </a:ln>
+        </p:spPr>
+        <p:style>
+          <a:lnRef idx="2">
+            <a:schemeClr val="accent1"/>
+          </a:lnRef>
+          <a:fillRef idx="0">
+            <a:schemeClr val="accent1"/>
+          </a:fillRef>
+          <a:effectRef idx="1">
+            <a:schemeClr val="accent1"/>
+          </a:effectRef>
+          <a:fontRef idx="minor">
+            <a:schemeClr val="tx1"/>
+          </a:fontRef>
+        </p:style>
+      </p:cxnSp>
+      <p:cxnSp>
+        <p:nvCxnSpPr>
+          <p:cNvPr id="72" name="연결선: 구부러짐 71">
+            <a:extLst>
+              <a:ext uri="{FF2B5EF4-FFF2-40B4-BE49-F238E27FC236}">
+                <a16:creationId xmlns:a16="http://schemas.microsoft.com/office/drawing/2014/main" id="{45F533AA-4AB1-4A0F-0F2D-9A3E099ADA36}"/>
+              </a:ext>
+            </a:extLst>
+          </p:cNvPr>
+          <p:cNvCxnSpPr>
+            <a:cxnSpLocks/>
+            <a:stCxn id="5" idx="3"/>
+            <a:endCxn id="19" idx="1"/>
+          </p:cNvCxnSpPr>
+          <p:nvPr/>
+        </p:nvCxnSpPr>
+        <p:spPr>
+          <a:xfrm flipV="1">
+            <a:off x="4212590" y="2616063"/>
+            <a:ext cx="1180505" cy="940731"/>
+          </a:xfrm>
+          <a:prstGeom prst="curvedConnector3">
+            <a:avLst>
+              <a:gd name="adj1" fmla="val 50000"/>
+            </a:avLst>
+          </a:prstGeom>
+          <a:ln w="12700">
+            <a:solidFill>
+              <a:schemeClr val="accent2"/>
+            </a:solidFill>
+            <a:tailEnd type="triangle"/>
+          </a:ln>
+        </p:spPr>
+        <p:style>
+          <a:lnRef idx="2">
+            <a:schemeClr val="accent1"/>
+          </a:lnRef>
+          <a:fillRef idx="0">
+            <a:schemeClr val="accent1"/>
+          </a:fillRef>
+          <a:effectRef idx="1">
+            <a:schemeClr val="accent1"/>
+          </a:effectRef>
+          <a:fontRef idx="minor">
+            <a:schemeClr val="tx1"/>
+          </a:fontRef>
+        </p:style>
+      </p:cxnSp>
+      <p:cxnSp>
+        <p:nvCxnSpPr>
+          <p:cNvPr id="75" name="연결선: 구부러짐 74">
+            <a:extLst>
+              <a:ext uri="{FF2B5EF4-FFF2-40B4-BE49-F238E27FC236}">
+                <a16:creationId xmlns:a16="http://schemas.microsoft.com/office/drawing/2014/main" id="{C40A936A-FD78-AFDC-B8AD-5391B6F0CB05}"/>
+              </a:ext>
+            </a:extLst>
+          </p:cNvPr>
+          <p:cNvCxnSpPr>
+            <a:cxnSpLocks/>
+            <a:stCxn id="5" idx="3"/>
+            <a:endCxn id="20" idx="1"/>
+          </p:cNvCxnSpPr>
+          <p:nvPr/>
+        </p:nvCxnSpPr>
+        <p:spPr>
+          <a:xfrm flipV="1">
+            <a:off x="4212590" y="3222111"/>
+            <a:ext cx="1180505" cy="334683"/>
+          </a:xfrm>
+          <a:prstGeom prst="curvedConnector3">
+            <a:avLst>
+              <a:gd name="adj1" fmla="val 50000"/>
+            </a:avLst>
+          </a:prstGeom>
+          <a:ln w="12700">
+            <a:solidFill>
+              <a:schemeClr val="accent2"/>
+            </a:solidFill>
+            <a:tailEnd type="triangle"/>
+          </a:ln>
+        </p:spPr>
+        <p:style>
+          <a:lnRef idx="2">
+            <a:schemeClr val="accent1"/>
+          </a:lnRef>
+          <a:fillRef idx="0">
+            <a:schemeClr val="accent1"/>
+          </a:fillRef>
+          <a:effectRef idx="1">
+            <a:schemeClr val="accent1"/>
+          </a:effectRef>
+          <a:fontRef idx="minor">
+            <a:schemeClr val="tx1"/>
+          </a:fontRef>
+        </p:style>
+      </p:cxnSp>
+      <p:cxnSp>
+        <p:nvCxnSpPr>
+          <p:cNvPr id="81" name="연결선: 구부러짐 80">
+            <a:extLst>
+              <a:ext uri="{FF2B5EF4-FFF2-40B4-BE49-F238E27FC236}">
+                <a16:creationId xmlns:a16="http://schemas.microsoft.com/office/drawing/2014/main" id="{20BF16FD-9917-4600-25E3-285E564A742D}"/>
+              </a:ext>
+            </a:extLst>
+          </p:cNvPr>
+          <p:cNvCxnSpPr>
+            <a:cxnSpLocks/>
+            <a:stCxn id="5" idx="3"/>
+            <a:endCxn id="22" idx="1"/>
+          </p:cNvCxnSpPr>
+          <p:nvPr/>
+        </p:nvCxnSpPr>
+        <p:spPr>
+          <a:xfrm>
+            <a:off x="4212590" y="3556794"/>
+            <a:ext cx="1180505" cy="877413"/>
+          </a:xfrm>
+          <a:prstGeom prst="curvedConnector3">
+            <a:avLst>
+              <a:gd name="adj1" fmla="val 50000"/>
+            </a:avLst>
+          </a:prstGeom>
+          <a:ln w="12700">
+            <a:solidFill>
+              <a:schemeClr val="accent2"/>
+            </a:solidFill>
+            <a:tailEnd type="triangle"/>
+          </a:ln>
+        </p:spPr>
+        <p:style>
+          <a:lnRef idx="2">
+            <a:schemeClr val="accent1"/>
+          </a:lnRef>
+          <a:fillRef idx="0">
+            <a:schemeClr val="accent1"/>
+          </a:fillRef>
+          <a:effectRef idx="1">
+            <a:schemeClr val="accent1"/>
+          </a:effectRef>
+          <a:fontRef idx="minor">
+            <a:schemeClr val="tx1"/>
+          </a:fontRef>
+        </p:style>
+      </p:cxnSp>
+      <p:cxnSp>
+        <p:nvCxnSpPr>
+          <p:cNvPr id="84" name="연결선: 구부러짐 83">
+            <a:extLst>
+              <a:ext uri="{FF2B5EF4-FFF2-40B4-BE49-F238E27FC236}">
+                <a16:creationId xmlns:a16="http://schemas.microsoft.com/office/drawing/2014/main" id="{1F19230B-4D8D-3F0C-0596-54E54879851E}"/>
+              </a:ext>
+            </a:extLst>
+          </p:cNvPr>
+          <p:cNvCxnSpPr>
+            <a:cxnSpLocks/>
+            <a:stCxn id="5" idx="3"/>
+            <a:endCxn id="23" idx="1"/>
+          </p:cNvCxnSpPr>
+          <p:nvPr/>
+        </p:nvCxnSpPr>
+        <p:spPr>
+          <a:xfrm>
+            <a:off x="4212590" y="3556794"/>
+            <a:ext cx="1180505" cy="1483461"/>
+          </a:xfrm>
+          <a:prstGeom prst="curvedConnector3">
+            <a:avLst>
+              <a:gd name="adj1" fmla="val 50000"/>
+            </a:avLst>
+          </a:prstGeom>
+          <a:ln w="12700">
+            <a:solidFill>
+              <a:schemeClr val="accent2"/>
+            </a:solidFill>
+            <a:tailEnd type="triangle"/>
+          </a:ln>
+        </p:spPr>
+        <p:style>
+          <a:lnRef idx="2">
+            <a:schemeClr val="accent1"/>
+          </a:lnRef>
+          <a:fillRef idx="0">
+            <a:schemeClr val="accent1"/>
+          </a:fillRef>
+          <a:effectRef idx="1">
+            <a:schemeClr val="accent1"/>
+          </a:effectRef>
+          <a:fontRef idx="minor">
+            <a:schemeClr val="tx1"/>
+          </a:fontRef>
+        </p:style>
+      </p:cxnSp>
+      <p:cxnSp>
+        <p:nvCxnSpPr>
+          <p:cNvPr id="87" name="연결선: 구부러짐 86">
+            <a:extLst>
+              <a:ext uri="{FF2B5EF4-FFF2-40B4-BE49-F238E27FC236}">
+                <a16:creationId xmlns:a16="http://schemas.microsoft.com/office/drawing/2014/main" id="{E96AB56A-2277-A384-122D-E335D5237066}"/>
+              </a:ext>
+            </a:extLst>
+          </p:cNvPr>
+          <p:cNvCxnSpPr>
+            <a:cxnSpLocks/>
+            <a:stCxn id="5" idx="3"/>
+            <a:endCxn id="24" idx="1"/>
+          </p:cNvCxnSpPr>
+          <p:nvPr/>
+        </p:nvCxnSpPr>
+        <p:spPr>
+          <a:xfrm>
+            <a:off x="4212590" y="3556794"/>
+            <a:ext cx="1180505" cy="2089509"/>
+          </a:xfrm>
+          <a:prstGeom prst="curvedConnector3">
+            <a:avLst>
+              <a:gd name="adj1" fmla="val 50000"/>
+            </a:avLst>
+          </a:prstGeom>
+          <a:ln w="12700">
+            <a:solidFill>
+              <a:schemeClr val="accent2"/>
+            </a:solidFill>
+            <a:tailEnd type="triangle"/>
+          </a:ln>
+        </p:spPr>
+        <p:style>
+          <a:lnRef idx="2">
+            <a:schemeClr val="accent1"/>
+          </a:lnRef>
+          <a:fillRef idx="0">
+            <a:schemeClr val="accent1"/>
+          </a:fillRef>
+          <a:effectRef idx="1">
+            <a:schemeClr val="accent1"/>
+          </a:effectRef>
+          <a:fontRef idx="minor">
+            <a:schemeClr val="tx1"/>
+          </a:fontRef>
+        </p:style>
+      </p:cxnSp>
+      <p:cxnSp>
+        <p:nvCxnSpPr>
+          <p:cNvPr id="90" name="연결선: 구부러짐 89">
+            <a:extLst>
+              <a:ext uri="{FF2B5EF4-FFF2-40B4-BE49-F238E27FC236}">
+                <a16:creationId xmlns:a16="http://schemas.microsoft.com/office/drawing/2014/main" id="{3014D3F7-2F53-EDDD-29C8-F94A5889A889}"/>
+              </a:ext>
+            </a:extLst>
+          </p:cNvPr>
+          <p:cNvCxnSpPr>
+            <a:cxnSpLocks/>
+            <a:stCxn id="5" idx="3"/>
+            <a:endCxn id="25" idx="1"/>
+          </p:cNvCxnSpPr>
+          <p:nvPr/>
+        </p:nvCxnSpPr>
+        <p:spPr>
+          <a:xfrm>
+            <a:off x="4212590" y="3556794"/>
+            <a:ext cx="1180505" cy="2695565"/>
+          </a:xfrm>
+          <a:prstGeom prst="curvedConnector3">
+            <a:avLst>
+              <a:gd name="adj1" fmla="val 50000"/>
+            </a:avLst>
+          </a:prstGeom>
+          <a:ln w="12700">
+            <a:solidFill>
+              <a:schemeClr val="accent2"/>
+            </a:solidFill>
+            <a:tailEnd type="triangle"/>
+          </a:ln>
+        </p:spPr>
+        <p:style>
+          <a:lnRef idx="2">
+            <a:schemeClr val="accent1"/>
+          </a:lnRef>
+          <a:fillRef idx="0">
+            <a:schemeClr val="accent1"/>
+          </a:fillRef>
+          <a:effectRef idx="1">
+            <a:schemeClr val="accent1"/>
+          </a:effectRef>
+          <a:fontRef idx="minor">
+            <a:schemeClr val="tx1"/>
+          </a:fontRef>
+        </p:style>
+      </p:cxnSp>
+      <p:sp>
+        <p:nvSpPr>
+          <p:cNvPr id="2" name="직사각형 1">
+            <a:extLst>
+              <a:ext uri="{FF2B5EF4-FFF2-40B4-BE49-F238E27FC236}">
+                <a16:creationId xmlns:a16="http://schemas.microsoft.com/office/drawing/2014/main" id="{0CFD4135-C0ED-F514-1096-7EA78DC2BE78}"/>
+              </a:ext>
+            </a:extLst>
+          </p:cNvPr>
+          <p:cNvSpPr/>
+          <p:nvPr/>
+        </p:nvSpPr>
+        <p:spPr>
+          <a:xfrm>
+            <a:off x="401318" y="2097372"/>
+            <a:ext cx="565150" cy="2921000"/>
+          </a:xfrm>
+          <a:prstGeom prst="rect">
+            <a:avLst/>
+          </a:prstGeom>
+          <a:solidFill>
+            <a:schemeClr val="tx2">
+              <a:lumMod val="10000"/>
+              <a:lumOff val="90000"/>
+            </a:schemeClr>
+          </a:solidFill>
+          <a:ln w="12700"/>
+        </p:spPr>
+        <p:style>
+          <a:lnRef idx="2">
+            <a:schemeClr val="accent1">
+              <a:shade val="15000"/>
+            </a:schemeClr>
+          </a:lnRef>
+          <a:fillRef idx="1">
+            <a:schemeClr val="accent1"/>
+          </a:fillRef>
+          <a:effectRef idx="0">
+            <a:schemeClr val="accent1"/>
+          </a:effectRef>
+          <a:fontRef idx="minor">
+            <a:schemeClr val="lt1"/>
+          </a:fontRef>
+        </p:style>
+        <p:txBody>
+          <a:bodyPr rtlCol="0" anchor="ctr"/>
+          <a:lstStyle/>
+          <a:p>
+            <a:pPr algn="ctr"/>
+            <a:r>
+              <a:rPr lang="en-US" altLang="ko-KR" sz="1600" dirty="0">
+                <a:solidFill>
+                  <a:sysClr val="windowText" lastClr="000000"/>
+                </a:solidFill>
+              </a:rPr>
+              <a:t>SPI</a:t>
+            </a:r>
+            <a:endParaRPr lang="ko-KR" altLang="en-US" sz="1600" dirty="0">
+              <a:solidFill>
+                <a:sysClr val="windowText" lastClr="000000"/>
+              </a:solidFill>
+            </a:endParaRPr>
+          </a:p>
+        </p:txBody>
+      </p:sp>
+      <p:sp>
+        <p:nvSpPr>
+          <p:cNvPr id="3" name="직사각형 2">
+            <a:extLst>
+              <a:ext uri="{FF2B5EF4-FFF2-40B4-BE49-F238E27FC236}">
+                <a16:creationId xmlns:a16="http://schemas.microsoft.com/office/drawing/2014/main" id="{65D4E3CE-FB17-A95F-01CD-7833287C8BFB}"/>
+              </a:ext>
+            </a:extLst>
+          </p:cNvPr>
+          <p:cNvSpPr/>
+          <p:nvPr/>
+        </p:nvSpPr>
+        <p:spPr>
+          <a:xfrm>
+            <a:off x="1118868" y="3228819"/>
+            <a:ext cx="717550" cy="650875"/>
+          </a:xfrm>
+          <a:prstGeom prst="rect">
+            <a:avLst/>
+          </a:prstGeom>
+          <a:solidFill>
+            <a:schemeClr val="tx2">
+              <a:lumMod val="10000"/>
+              <a:lumOff val="90000"/>
+            </a:schemeClr>
+          </a:solidFill>
+          <a:ln w="12700"/>
+        </p:spPr>
+        <p:style>
+          <a:lnRef idx="2">
+            <a:schemeClr val="accent1">
+              <a:shade val="15000"/>
+            </a:schemeClr>
+          </a:lnRef>
+          <a:fillRef idx="1">
+            <a:schemeClr val="accent1"/>
+          </a:fillRef>
+          <a:effectRef idx="0">
+            <a:schemeClr val="accent1"/>
+          </a:effectRef>
+          <a:fontRef idx="minor">
+            <a:schemeClr val="lt1"/>
+          </a:fontRef>
+        </p:style>
+        <p:txBody>
+          <a:bodyPr rtlCol="0" anchor="ctr"/>
+          <a:lstStyle/>
+          <a:p>
+            <a:pPr algn="ctr"/>
+            <a:r>
+              <a:rPr lang="en-US" altLang="ko-KR" sz="1100" dirty="0">
+                <a:solidFill>
+                  <a:sysClr val="windowText" lastClr="000000"/>
+                </a:solidFill>
+              </a:rPr>
+              <a:t>Decoder</a:t>
+            </a:r>
+            <a:endParaRPr lang="ko-KR" altLang="en-US" sz="1100" dirty="0">
+              <a:solidFill>
+                <a:sysClr val="windowText" lastClr="000000"/>
+              </a:solidFill>
+            </a:endParaRPr>
+          </a:p>
+        </p:txBody>
+      </p:sp>
+      <p:sp>
+        <p:nvSpPr>
+          <p:cNvPr id="4" name="직사각형 3">
+            <a:extLst>
+              <a:ext uri="{FF2B5EF4-FFF2-40B4-BE49-F238E27FC236}">
+                <a16:creationId xmlns:a16="http://schemas.microsoft.com/office/drawing/2014/main" id="{9C9D1F68-0B26-8AC5-B857-9D49F9015064}"/>
+              </a:ext>
+            </a:extLst>
+          </p:cNvPr>
+          <p:cNvSpPr/>
+          <p:nvPr/>
+        </p:nvSpPr>
+        <p:spPr>
+          <a:xfrm>
+            <a:off x="1988818" y="3426462"/>
+            <a:ext cx="431800" cy="255587"/>
+          </a:xfrm>
+          <a:prstGeom prst="rect">
+            <a:avLst/>
+          </a:prstGeom>
+          <a:solidFill>
+            <a:schemeClr val="tx2">
+              <a:lumMod val="10000"/>
+              <a:lumOff val="90000"/>
+            </a:schemeClr>
+          </a:solidFill>
+          <a:ln w="12700"/>
+        </p:spPr>
+        <p:style>
+          <a:lnRef idx="2">
+            <a:schemeClr val="accent1">
+              <a:shade val="15000"/>
+            </a:schemeClr>
+          </a:lnRef>
+          <a:fillRef idx="1">
+            <a:schemeClr val="accent1"/>
+          </a:fillRef>
+          <a:effectRef idx="0">
+            <a:schemeClr val="accent1"/>
+          </a:effectRef>
+          <a:fontRef idx="minor">
+            <a:schemeClr val="lt1"/>
+          </a:fontRef>
+        </p:style>
+        <p:txBody>
+          <a:bodyPr rtlCol="0" anchor="ctr"/>
+          <a:lstStyle/>
+          <a:p>
+            <a:pPr algn="ctr"/>
+            <a:r>
+              <a:rPr lang="en-US" altLang="ko-KR" sz="1100" dirty="0">
+                <a:solidFill>
+                  <a:sysClr val="windowText" lastClr="000000"/>
+                </a:solidFill>
+              </a:rPr>
+              <a:t>DFF</a:t>
+            </a:r>
+            <a:endParaRPr lang="ko-KR" altLang="en-US" sz="1100" dirty="0">
+              <a:solidFill>
+                <a:sysClr val="windowText" lastClr="000000"/>
+              </a:solidFill>
+            </a:endParaRPr>
+          </a:p>
+        </p:txBody>
+      </p:sp>
+      <p:sp>
+        <p:nvSpPr>
+          <p:cNvPr id="5" name="직사각형 4">
+            <a:extLst>
+              <a:ext uri="{FF2B5EF4-FFF2-40B4-BE49-F238E27FC236}">
+                <a16:creationId xmlns:a16="http://schemas.microsoft.com/office/drawing/2014/main" id="{05EC9F08-087C-EB27-0C2C-E7DBD5CB9104}"/>
+              </a:ext>
+            </a:extLst>
+          </p:cNvPr>
+          <p:cNvSpPr/>
+          <p:nvPr/>
+        </p:nvSpPr>
+        <p:spPr>
+          <a:xfrm>
+            <a:off x="3557270" y="3429000"/>
+            <a:ext cx="655320" cy="255587"/>
+          </a:xfrm>
+          <a:prstGeom prst="rect">
+            <a:avLst/>
+          </a:prstGeom>
+          <a:solidFill>
+            <a:schemeClr val="tx2">
+              <a:lumMod val="10000"/>
+              <a:lumOff val="90000"/>
+            </a:schemeClr>
+          </a:solidFill>
+          <a:ln w="12700"/>
+        </p:spPr>
+        <p:style>
+          <a:lnRef idx="2">
+            <a:schemeClr val="accent1">
+              <a:shade val="15000"/>
+            </a:schemeClr>
+          </a:lnRef>
+          <a:fillRef idx="1">
+            <a:schemeClr val="accent1"/>
+          </a:fillRef>
+          <a:effectRef idx="0">
+            <a:schemeClr val="accent1"/>
+          </a:effectRef>
+          <a:fontRef idx="minor">
+            <a:schemeClr val="lt1"/>
+          </a:fontRef>
+        </p:style>
+        <p:txBody>
+          <a:bodyPr rtlCol="0" anchor="ctr"/>
+          <a:lstStyle/>
+          <a:p>
+            <a:pPr algn="ctr"/>
+            <a:r>
+              <a:rPr lang="en-US" altLang="ko-KR" sz="1100" dirty="0">
+                <a:solidFill>
+                  <a:sysClr val="windowText" lastClr="000000"/>
+                </a:solidFill>
+              </a:rPr>
+              <a:t>Router</a:t>
+            </a:r>
+            <a:endParaRPr lang="ko-KR" altLang="en-US" sz="1100" dirty="0">
+              <a:solidFill>
+                <a:sysClr val="windowText" lastClr="000000"/>
+              </a:solidFill>
+            </a:endParaRPr>
+          </a:p>
+        </p:txBody>
+      </p:sp>
+      <p:sp>
+        <p:nvSpPr>
+          <p:cNvPr id="17" name="직사각형 16">
+            <a:extLst>
+              <a:ext uri="{FF2B5EF4-FFF2-40B4-BE49-F238E27FC236}">
+                <a16:creationId xmlns:a16="http://schemas.microsoft.com/office/drawing/2014/main" id="{99CAF2B5-2CC0-BC49-4DD2-4BA5712BFE78}"/>
+              </a:ext>
+            </a:extLst>
+          </p:cNvPr>
+          <p:cNvSpPr/>
+          <p:nvPr/>
+        </p:nvSpPr>
+        <p:spPr>
+          <a:xfrm>
+            <a:off x="5393095" y="1276173"/>
+            <a:ext cx="520700" cy="255587"/>
+          </a:xfrm>
+          <a:prstGeom prst="rect">
+            <a:avLst/>
+          </a:prstGeom>
+          <a:solidFill>
+            <a:schemeClr val="accent2">
+              <a:lumMod val="20000"/>
+              <a:lumOff val="80000"/>
+            </a:schemeClr>
+          </a:solidFill>
+          <a:ln w="12700"/>
+        </p:spPr>
+        <p:style>
+          <a:lnRef idx="2">
+            <a:schemeClr val="accent1">
+              <a:shade val="15000"/>
+            </a:schemeClr>
+          </a:lnRef>
+          <a:fillRef idx="1">
+            <a:schemeClr val="accent1"/>
+          </a:fillRef>
+          <a:effectRef idx="0">
+            <a:schemeClr val="accent1"/>
+          </a:effectRef>
+          <a:fontRef idx="minor">
+            <a:schemeClr val="lt1"/>
+          </a:fontRef>
+        </p:style>
+        <p:txBody>
+          <a:bodyPr rtlCol="0" anchor="ctr"/>
+          <a:lstStyle/>
+          <a:p>
+            <a:pPr algn="ctr"/>
+            <a:r>
+              <a:rPr lang="en-US" altLang="ko-KR" sz="1100" dirty="0">
+                <a:solidFill>
+                  <a:sysClr val="windowText" lastClr="000000"/>
+                </a:solidFill>
+              </a:rPr>
+              <a:t>DFF1</a:t>
+            </a:r>
+            <a:endParaRPr lang="ko-KR" altLang="en-US" sz="1100" dirty="0">
+              <a:solidFill>
+                <a:sysClr val="windowText" lastClr="000000"/>
+              </a:solidFill>
+            </a:endParaRPr>
+          </a:p>
+        </p:txBody>
+      </p:sp>
+      <p:sp>
+        <p:nvSpPr>
+          <p:cNvPr id="18" name="직사각형 17">
+            <a:extLst>
+              <a:ext uri="{FF2B5EF4-FFF2-40B4-BE49-F238E27FC236}">
+                <a16:creationId xmlns:a16="http://schemas.microsoft.com/office/drawing/2014/main" id="{3ACB00D3-91BA-3429-1FB0-1EA86714BA08}"/>
+              </a:ext>
+            </a:extLst>
+          </p:cNvPr>
+          <p:cNvSpPr/>
+          <p:nvPr/>
+        </p:nvSpPr>
+        <p:spPr>
+          <a:xfrm>
+            <a:off x="5393095" y="1882221"/>
+            <a:ext cx="520700" cy="255587"/>
+          </a:xfrm>
+          <a:prstGeom prst="rect">
+            <a:avLst/>
+          </a:prstGeom>
+          <a:solidFill>
+            <a:schemeClr val="accent2">
+              <a:lumMod val="20000"/>
+              <a:lumOff val="80000"/>
+            </a:schemeClr>
+          </a:solidFill>
+          <a:ln w="12700"/>
+        </p:spPr>
+        <p:style>
+          <a:lnRef idx="2">
+            <a:schemeClr val="accent1">
+              <a:shade val="15000"/>
+            </a:schemeClr>
+          </a:lnRef>
+          <a:fillRef idx="1">
+            <a:schemeClr val="accent1"/>
+          </a:fillRef>
+          <a:effectRef idx="0">
+            <a:schemeClr val="accent1"/>
+          </a:effectRef>
+          <a:fontRef idx="minor">
+            <a:schemeClr val="lt1"/>
+          </a:fontRef>
+        </p:style>
+        <p:txBody>
+          <a:bodyPr rtlCol="0" anchor="ctr"/>
+          <a:lstStyle/>
+          <a:p>
+            <a:pPr algn="ctr"/>
+            <a:r>
+              <a:rPr lang="en-US" altLang="ko-KR" sz="1100" dirty="0">
+                <a:solidFill>
+                  <a:sysClr val="windowText" lastClr="000000"/>
+                </a:solidFill>
+              </a:rPr>
+              <a:t>DFF2</a:t>
+            </a:r>
+            <a:endParaRPr lang="ko-KR" altLang="en-US" sz="1100" dirty="0">
+              <a:solidFill>
+                <a:sysClr val="windowText" lastClr="000000"/>
+              </a:solidFill>
+            </a:endParaRPr>
+          </a:p>
+        </p:txBody>
+      </p:sp>
+      <p:sp>
+        <p:nvSpPr>
+          <p:cNvPr id="19" name="직사각형 18">
+            <a:extLst>
+              <a:ext uri="{FF2B5EF4-FFF2-40B4-BE49-F238E27FC236}">
+                <a16:creationId xmlns:a16="http://schemas.microsoft.com/office/drawing/2014/main" id="{BF06112F-1D5F-4167-3374-752D79646028}"/>
+              </a:ext>
+            </a:extLst>
+          </p:cNvPr>
+          <p:cNvSpPr/>
+          <p:nvPr/>
+        </p:nvSpPr>
+        <p:spPr>
+          <a:xfrm>
+            <a:off x="5393095" y="2488269"/>
+            <a:ext cx="520700" cy="255587"/>
+          </a:xfrm>
+          <a:prstGeom prst="rect">
+            <a:avLst/>
+          </a:prstGeom>
+          <a:solidFill>
+            <a:schemeClr val="accent2">
+              <a:lumMod val="20000"/>
+              <a:lumOff val="80000"/>
+            </a:schemeClr>
+          </a:solidFill>
+          <a:ln w="12700"/>
+        </p:spPr>
+        <p:style>
+          <a:lnRef idx="2">
+            <a:schemeClr val="accent1">
+              <a:shade val="15000"/>
+            </a:schemeClr>
+          </a:lnRef>
+          <a:fillRef idx="1">
+            <a:schemeClr val="accent1"/>
+          </a:fillRef>
+          <a:effectRef idx="0">
+            <a:schemeClr val="accent1"/>
+          </a:effectRef>
+          <a:fontRef idx="minor">
+            <a:schemeClr val="lt1"/>
+          </a:fontRef>
+        </p:style>
+        <p:txBody>
+          <a:bodyPr rtlCol="0" anchor="ctr"/>
+          <a:lstStyle/>
+          <a:p>
+            <a:pPr algn="ctr"/>
+            <a:r>
+              <a:rPr lang="en-US" altLang="ko-KR" sz="1100" dirty="0">
+                <a:solidFill>
+                  <a:sysClr val="windowText" lastClr="000000"/>
+                </a:solidFill>
+              </a:rPr>
+              <a:t>DFF3</a:t>
+            </a:r>
+            <a:endParaRPr lang="ko-KR" altLang="en-US" sz="1100" dirty="0">
+              <a:solidFill>
+                <a:sysClr val="windowText" lastClr="000000"/>
+              </a:solidFill>
+            </a:endParaRPr>
+          </a:p>
+        </p:txBody>
+      </p:sp>
+      <p:sp>
+        <p:nvSpPr>
+          <p:cNvPr id="20" name="직사각형 19">
+            <a:extLst>
+              <a:ext uri="{FF2B5EF4-FFF2-40B4-BE49-F238E27FC236}">
+                <a16:creationId xmlns:a16="http://schemas.microsoft.com/office/drawing/2014/main" id="{486D9BF2-9E6A-875B-627D-288EE067BD2B}"/>
+              </a:ext>
+            </a:extLst>
+          </p:cNvPr>
+          <p:cNvSpPr/>
+          <p:nvPr/>
+        </p:nvSpPr>
+        <p:spPr>
+          <a:xfrm>
+            <a:off x="5393095" y="3094317"/>
+            <a:ext cx="520700" cy="255587"/>
+          </a:xfrm>
+          <a:prstGeom prst="rect">
+            <a:avLst/>
+          </a:prstGeom>
+          <a:solidFill>
+            <a:schemeClr val="accent2">
+              <a:lumMod val="20000"/>
+              <a:lumOff val="80000"/>
+            </a:schemeClr>
+          </a:solidFill>
+          <a:ln w="12700"/>
+        </p:spPr>
+        <p:style>
+          <a:lnRef idx="2">
+            <a:schemeClr val="accent1">
+              <a:shade val="15000"/>
+            </a:schemeClr>
+          </a:lnRef>
+          <a:fillRef idx="1">
+            <a:schemeClr val="accent1"/>
+          </a:fillRef>
+          <a:effectRef idx="0">
+            <a:schemeClr val="accent1"/>
+          </a:effectRef>
+          <a:fontRef idx="minor">
+            <a:schemeClr val="lt1"/>
+          </a:fontRef>
+        </p:style>
+        <p:txBody>
+          <a:bodyPr rtlCol="0" anchor="ctr"/>
+          <a:lstStyle/>
+          <a:p>
+            <a:pPr algn="ctr"/>
+            <a:r>
+              <a:rPr lang="en-US" altLang="ko-KR" sz="1100" dirty="0">
+                <a:solidFill>
+                  <a:sysClr val="windowText" lastClr="000000"/>
+                </a:solidFill>
+              </a:rPr>
+              <a:t>DFF4</a:t>
+            </a:r>
+            <a:endParaRPr lang="ko-KR" altLang="en-US" sz="1100" dirty="0">
+              <a:solidFill>
+                <a:sysClr val="windowText" lastClr="000000"/>
+              </a:solidFill>
+            </a:endParaRPr>
+          </a:p>
+        </p:txBody>
+      </p:sp>
+      <p:sp>
+        <p:nvSpPr>
+          <p:cNvPr id="21" name="직사각형 20">
+            <a:extLst>
+              <a:ext uri="{FF2B5EF4-FFF2-40B4-BE49-F238E27FC236}">
+                <a16:creationId xmlns:a16="http://schemas.microsoft.com/office/drawing/2014/main" id="{1237FF2D-FA6C-5019-251B-248B76F0A111}"/>
+              </a:ext>
+            </a:extLst>
+          </p:cNvPr>
+          <p:cNvSpPr/>
+          <p:nvPr/>
+        </p:nvSpPr>
+        <p:spPr>
+          <a:xfrm>
+            <a:off x="5393095" y="3700365"/>
+            <a:ext cx="520700" cy="255587"/>
+          </a:xfrm>
+          <a:prstGeom prst="rect">
+            <a:avLst/>
+          </a:prstGeom>
+          <a:solidFill>
+            <a:schemeClr val="accent2">
+              <a:lumMod val="20000"/>
+              <a:lumOff val="80000"/>
+            </a:schemeClr>
+          </a:solidFill>
+          <a:ln w="12700"/>
+        </p:spPr>
+        <p:style>
+          <a:lnRef idx="2">
+            <a:schemeClr val="accent1">
+              <a:shade val="15000"/>
+            </a:schemeClr>
+          </a:lnRef>
+          <a:fillRef idx="1">
+            <a:schemeClr val="accent1"/>
+          </a:fillRef>
+          <a:effectRef idx="0">
+            <a:schemeClr val="accent1"/>
+          </a:effectRef>
+          <a:fontRef idx="minor">
+            <a:schemeClr val="lt1"/>
+          </a:fontRef>
+        </p:style>
+        <p:txBody>
+          <a:bodyPr rtlCol="0" anchor="ctr"/>
+          <a:lstStyle/>
+          <a:p>
+            <a:pPr algn="ctr"/>
+            <a:r>
+              <a:rPr lang="en-US" altLang="ko-KR" sz="1100" dirty="0">
+                <a:solidFill>
+                  <a:sysClr val="windowText" lastClr="000000"/>
+                </a:solidFill>
+              </a:rPr>
+              <a:t>DFF5</a:t>
+            </a:r>
+            <a:endParaRPr lang="ko-KR" altLang="en-US" sz="1100" dirty="0">
+              <a:solidFill>
+                <a:sysClr val="windowText" lastClr="000000"/>
+              </a:solidFill>
+            </a:endParaRPr>
+          </a:p>
+        </p:txBody>
+      </p:sp>
+      <p:sp>
+        <p:nvSpPr>
+          <p:cNvPr id="22" name="직사각형 21">
+            <a:extLst>
+              <a:ext uri="{FF2B5EF4-FFF2-40B4-BE49-F238E27FC236}">
+                <a16:creationId xmlns:a16="http://schemas.microsoft.com/office/drawing/2014/main" id="{0D62D996-5653-DFE4-E06D-1377D1B75EEC}"/>
+              </a:ext>
+            </a:extLst>
+          </p:cNvPr>
+          <p:cNvSpPr/>
+          <p:nvPr/>
+        </p:nvSpPr>
+        <p:spPr>
+          <a:xfrm>
+            <a:off x="5393095" y="4306413"/>
+            <a:ext cx="520700" cy="255587"/>
+          </a:xfrm>
+          <a:prstGeom prst="rect">
+            <a:avLst/>
+          </a:prstGeom>
+          <a:solidFill>
+            <a:schemeClr val="accent2">
+              <a:lumMod val="20000"/>
+              <a:lumOff val="80000"/>
+            </a:schemeClr>
+          </a:solidFill>
+          <a:ln w="12700"/>
+        </p:spPr>
+        <p:style>
+          <a:lnRef idx="2">
+            <a:schemeClr val="accent1">
+              <a:shade val="15000"/>
+            </a:schemeClr>
+          </a:lnRef>
+          <a:fillRef idx="1">
+            <a:schemeClr val="accent1"/>
+          </a:fillRef>
+          <a:effectRef idx="0">
+            <a:schemeClr val="accent1"/>
+          </a:effectRef>
+          <a:fontRef idx="minor">
+            <a:schemeClr val="lt1"/>
+          </a:fontRef>
+        </p:style>
+        <p:txBody>
+          <a:bodyPr rtlCol="0" anchor="ctr"/>
+          <a:lstStyle/>
+          <a:p>
+            <a:pPr algn="ctr"/>
+            <a:r>
+              <a:rPr lang="en-US" altLang="ko-KR" sz="1100" dirty="0">
+                <a:solidFill>
+                  <a:sysClr val="windowText" lastClr="000000"/>
+                </a:solidFill>
+              </a:rPr>
+              <a:t>DFF6</a:t>
+            </a:r>
+            <a:endParaRPr lang="ko-KR" altLang="en-US" sz="1100" dirty="0">
+              <a:solidFill>
+                <a:sysClr val="windowText" lastClr="000000"/>
+              </a:solidFill>
+            </a:endParaRPr>
+          </a:p>
+        </p:txBody>
+      </p:sp>
+      <p:sp>
+        <p:nvSpPr>
+          <p:cNvPr id="23" name="직사각형 22">
+            <a:extLst>
+              <a:ext uri="{FF2B5EF4-FFF2-40B4-BE49-F238E27FC236}">
+                <a16:creationId xmlns:a16="http://schemas.microsoft.com/office/drawing/2014/main" id="{1530E248-F1DD-BDD9-83C7-7AA98B9871A4}"/>
+              </a:ext>
+            </a:extLst>
+          </p:cNvPr>
+          <p:cNvSpPr/>
+          <p:nvPr/>
+        </p:nvSpPr>
+        <p:spPr>
+          <a:xfrm>
+            <a:off x="5393095" y="4912461"/>
+            <a:ext cx="520700" cy="255587"/>
+          </a:xfrm>
+          <a:prstGeom prst="rect">
+            <a:avLst/>
+          </a:prstGeom>
+          <a:solidFill>
+            <a:schemeClr val="accent2">
+              <a:lumMod val="20000"/>
+              <a:lumOff val="80000"/>
+            </a:schemeClr>
+          </a:solidFill>
+          <a:ln w="12700"/>
+        </p:spPr>
+        <p:style>
+          <a:lnRef idx="2">
+            <a:schemeClr val="accent1">
+              <a:shade val="15000"/>
+            </a:schemeClr>
+          </a:lnRef>
+          <a:fillRef idx="1">
+            <a:schemeClr val="accent1"/>
+          </a:fillRef>
+          <a:effectRef idx="0">
+            <a:schemeClr val="accent1"/>
+          </a:effectRef>
+          <a:fontRef idx="minor">
+            <a:schemeClr val="lt1"/>
+          </a:fontRef>
+        </p:style>
+        <p:txBody>
+          <a:bodyPr rtlCol="0" anchor="ctr"/>
+          <a:lstStyle/>
+          <a:p>
+            <a:pPr algn="ctr"/>
+            <a:r>
+              <a:rPr lang="en-US" altLang="ko-KR" sz="1100" dirty="0">
+                <a:solidFill>
+                  <a:sysClr val="windowText" lastClr="000000"/>
+                </a:solidFill>
+              </a:rPr>
+              <a:t>DFF7</a:t>
+            </a:r>
+            <a:endParaRPr lang="ko-KR" altLang="en-US" sz="1100" dirty="0">
+              <a:solidFill>
+                <a:sysClr val="windowText" lastClr="000000"/>
+              </a:solidFill>
+            </a:endParaRPr>
+          </a:p>
+        </p:txBody>
+      </p:sp>
+      <p:sp>
+        <p:nvSpPr>
+          <p:cNvPr id="24" name="직사각형 23">
+            <a:extLst>
+              <a:ext uri="{FF2B5EF4-FFF2-40B4-BE49-F238E27FC236}">
+                <a16:creationId xmlns:a16="http://schemas.microsoft.com/office/drawing/2014/main" id="{B1094DCB-95DA-393D-867B-8E5F83F0D838}"/>
+              </a:ext>
+            </a:extLst>
+          </p:cNvPr>
+          <p:cNvSpPr/>
+          <p:nvPr/>
+        </p:nvSpPr>
+        <p:spPr>
+          <a:xfrm>
+            <a:off x="5393095" y="5518509"/>
+            <a:ext cx="520700" cy="255587"/>
+          </a:xfrm>
+          <a:prstGeom prst="rect">
+            <a:avLst/>
+          </a:prstGeom>
+          <a:solidFill>
+            <a:schemeClr val="accent2">
+              <a:lumMod val="20000"/>
+              <a:lumOff val="80000"/>
+            </a:schemeClr>
+          </a:solidFill>
+          <a:ln w="12700"/>
+        </p:spPr>
+        <p:style>
+          <a:lnRef idx="2">
+            <a:schemeClr val="accent1">
+              <a:shade val="15000"/>
+            </a:schemeClr>
+          </a:lnRef>
+          <a:fillRef idx="1">
+            <a:schemeClr val="accent1"/>
+          </a:fillRef>
+          <a:effectRef idx="0">
+            <a:schemeClr val="accent1"/>
+          </a:effectRef>
+          <a:fontRef idx="minor">
+            <a:schemeClr val="lt1"/>
+          </a:fontRef>
+        </p:style>
+        <p:txBody>
+          <a:bodyPr rtlCol="0" anchor="ctr"/>
+          <a:lstStyle/>
+          <a:p>
+            <a:pPr algn="ctr"/>
+            <a:r>
+              <a:rPr lang="en-US" altLang="ko-KR" sz="1100" dirty="0">
+                <a:solidFill>
+                  <a:sysClr val="windowText" lastClr="000000"/>
+                </a:solidFill>
+              </a:rPr>
+              <a:t>DFF8</a:t>
+            </a:r>
+            <a:endParaRPr lang="ko-KR" altLang="en-US" sz="1100" dirty="0">
+              <a:solidFill>
+                <a:sysClr val="windowText" lastClr="000000"/>
+              </a:solidFill>
+            </a:endParaRPr>
+          </a:p>
+        </p:txBody>
+      </p:sp>
+      <p:sp>
+        <p:nvSpPr>
+          <p:cNvPr id="25" name="직사각형 24">
+            <a:extLst>
+              <a:ext uri="{FF2B5EF4-FFF2-40B4-BE49-F238E27FC236}">
+                <a16:creationId xmlns:a16="http://schemas.microsoft.com/office/drawing/2014/main" id="{4AB996CF-09DD-1D71-7808-591192D24E9F}"/>
+              </a:ext>
+            </a:extLst>
+          </p:cNvPr>
+          <p:cNvSpPr/>
+          <p:nvPr/>
+        </p:nvSpPr>
+        <p:spPr>
+          <a:xfrm>
+            <a:off x="5393095" y="6124565"/>
+            <a:ext cx="520700" cy="255587"/>
+          </a:xfrm>
+          <a:prstGeom prst="rect">
+            <a:avLst/>
+          </a:prstGeom>
+          <a:solidFill>
+            <a:schemeClr val="accent2">
+              <a:lumMod val="20000"/>
+              <a:lumOff val="80000"/>
+            </a:schemeClr>
+          </a:solidFill>
+          <a:ln w="12700"/>
+        </p:spPr>
+        <p:style>
+          <a:lnRef idx="2">
+            <a:schemeClr val="accent1">
+              <a:shade val="15000"/>
+            </a:schemeClr>
+          </a:lnRef>
+          <a:fillRef idx="1">
+            <a:schemeClr val="accent1"/>
+          </a:fillRef>
+          <a:effectRef idx="0">
+            <a:schemeClr val="accent1"/>
+          </a:effectRef>
+          <a:fontRef idx="minor">
+            <a:schemeClr val="lt1"/>
+          </a:fontRef>
+        </p:style>
+        <p:txBody>
+          <a:bodyPr rtlCol="0" anchor="ctr"/>
+          <a:lstStyle/>
+          <a:p>
+            <a:pPr algn="ctr"/>
+            <a:r>
+              <a:rPr lang="en-US" altLang="ko-KR" sz="1100" dirty="0">
+                <a:solidFill>
+                  <a:sysClr val="windowText" lastClr="000000"/>
+                </a:solidFill>
+              </a:rPr>
+              <a:t>DFF9</a:t>
+            </a:r>
+            <a:endParaRPr lang="ko-KR" altLang="en-US" sz="1100" dirty="0">
+              <a:solidFill>
+                <a:sysClr val="windowText" lastClr="000000"/>
+              </a:solidFill>
+            </a:endParaRPr>
+          </a:p>
+        </p:txBody>
+      </p:sp>
+      <p:cxnSp>
+        <p:nvCxnSpPr>
+          <p:cNvPr id="29" name="연결선: 구부러짐 28">
+            <a:extLst>
+              <a:ext uri="{FF2B5EF4-FFF2-40B4-BE49-F238E27FC236}">
+                <a16:creationId xmlns:a16="http://schemas.microsoft.com/office/drawing/2014/main" id="{6E6FCAB8-25B7-3F7C-DD69-6C73B1DDDB8D}"/>
+              </a:ext>
+            </a:extLst>
+          </p:cNvPr>
+          <p:cNvCxnSpPr>
+            <a:cxnSpLocks/>
+            <a:stCxn id="5" idx="3"/>
+            <a:endCxn id="6" idx="1"/>
+          </p:cNvCxnSpPr>
+          <p:nvPr/>
+        </p:nvCxnSpPr>
+        <p:spPr>
+          <a:xfrm flipV="1">
+            <a:off x="4212590" y="1100943"/>
+            <a:ext cx="748705" cy="2455851"/>
+          </a:xfrm>
+          <a:prstGeom prst="curvedConnector3">
+            <a:avLst/>
+          </a:prstGeom>
+          <a:ln w="12700">
+            <a:solidFill>
+              <a:schemeClr val="accent6">
+                <a:lumMod val="75000"/>
+              </a:schemeClr>
+            </a:solidFill>
+            <a:tailEnd type="triangle"/>
+          </a:ln>
+        </p:spPr>
+        <p:style>
+          <a:lnRef idx="2">
+            <a:schemeClr val="accent1"/>
+          </a:lnRef>
+          <a:fillRef idx="0">
+            <a:schemeClr val="accent1"/>
+          </a:fillRef>
+          <a:effectRef idx="1">
+            <a:schemeClr val="accent1"/>
+          </a:effectRef>
+          <a:fontRef idx="minor">
+            <a:schemeClr val="tx1"/>
+          </a:fontRef>
+        </p:style>
+      </p:cxnSp>
+      <p:cxnSp>
+        <p:nvCxnSpPr>
+          <p:cNvPr id="32" name="연결선: 구부러짐 31">
+            <a:extLst>
+              <a:ext uri="{FF2B5EF4-FFF2-40B4-BE49-F238E27FC236}">
+                <a16:creationId xmlns:a16="http://schemas.microsoft.com/office/drawing/2014/main" id="{A17593FD-C94F-8F5C-90F2-778A024ED2EB}"/>
+              </a:ext>
+            </a:extLst>
+          </p:cNvPr>
+          <p:cNvCxnSpPr>
+            <a:cxnSpLocks/>
+            <a:stCxn id="5" idx="3"/>
+            <a:endCxn id="7" idx="1"/>
+          </p:cNvCxnSpPr>
+          <p:nvPr/>
+        </p:nvCxnSpPr>
+        <p:spPr>
+          <a:xfrm flipV="1">
+            <a:off x="4212590" y="1706991"/>
+            <a:ext cx="748705" cy="1849803"/>
+          </a:xfrm>
+          <a:prstGeom prst="curvedConnector3">
+            <a:avLst>
+              <a:gd name="adj1" fmla="val 50000"/>
+            </a:avLst>
+          </a:prstGeom>
+          <a:ln w="12700">
+            <a:solidFill>
+              <a:schemeClr val="accent6">
+                <a:lumMod val="75000"/>
+              </a:schemeClr>
+            </a:solidFill>
+            <a:tailEnd type="triangle"/>
+          </a:ln>
+        </p:spPr>
+        <p:style>
+          <a:lnRef idx="2">
+            <a:schemeClr val="accent1"/>
+          </a:lnRef>
+          <a:fillRef idx="0">
+            <a:schemeClr val="accent1"/>
+          </a:fillRef>
+          <a:effectRef idx="1">
+            <a:schemeClr val="accent1"/>
+          </a:effectRef>
+          <a:fontRef idx="minor">
+            <a:schemeClr val="tx1"/>
+          </a:fontRef>
+        </p:style>
+      </p:cxnSp>
+      <p:cxnSp>
+        <p:nvCxnSpPr>
+          <p:cNvPr id="35" name="연결선: 구부러짐 34">
+            <a:extLst>
+              <a:ext uri="{FF2B5EF4-FFF2-40B4-BE49-F238E27FC236}">
+                <a16:creationId xmlns:a16="http://schemas.microsoft.com/office/drawing/2014/main" id="{C3635B7E-EF0C-E222-D1A9-482E48E60F38}"/>
+              </a:ext>
+            </a:extLst>
+          </p:cNvPr>
+          <p:cNvCxnSpPr>
+            <a:cxnSpLocks/>
+            <a:stCxn id="5" idx="3"/>
+            <a:endCxn id="8" idx="1"/>
+          </p:cNvCxnSpPr>
+          <p:nvPr/>
+        </p:nvCxnSpPr>
+        <p:spPr>
+          <a:xfrm flipV="1">
+            <a:off x="4212590" y="2313039"/>
+            <a:ext cx="748705" cy="1243755"/>
+          </a:xfrm>
+          <a:prstGeom prst="curvedConnector3">
+            <a:avLst>
+              <a:gd name="adj1" fmla="val 50000"/>
+            </a:avLst>
+          </a:prstGeom>
+          <a:ln w="12700">
+            <a:solidFill>
+              <a:schemeClr val="accent6">
+                <a:lumMod val="75000"/>
+              </a:schemeClr>
+            </a:solidFill>
+            <a:tailEnd type="triangle"/>
+          </a:ln>
+        </p:spPr>
+        <p:style>
+          <a:lnRef idx="2">
+            <a:schemeClr val="accent1"/>
+          </a:lnRef>
+          <a:fillRef idx="0">
+            <a:schemeClr val="accent1"/>
+          </a:fillRef>
+          <a:effectRef idx="1">
+            <a:schemeClr val="accent1"/>
+          </a:effectRef>
+          <a:fontRef idx="minor">
+            <a:schemeClr val="tx1"/>
+          </a:fontRef>
+        </p:style>
+      </p:cxnSp>
+      <p:cxnSp>
+        <p:nvCxnSpPr>
+          <p:cNvPr id="38" name="연결선: 구부러짐 37">
+            <a:extLst>
+              <a:ext uri="{FF2B5EF4-FFF2-40B4-BE49-F238E27FC236}">
+                <a16:creationId xmlns:a16="http://schemas.microsoft.com/office/drawing/2014/main" id="{EA9669D3-9E23-6FD5-DC5E-589610A3BDFB}"/>
+              </a:ext>
+            </a:extLst>
+          </p:cNvPr>
+          <p:cNvCxnSpPr>
+            <a:cxnSpLocks/>
+            <a:stCxn id="5" idx="3"/>
+            <a:endCxn id="9" idx="1"/>
+          </p:cNvCxnSpPr>
+          <p:nvPr/>
+        </p:nvCxnSpPr>
+        <p:spPr>
+          <a:xfrm flipV="1">
+            <a:off x="4212590" y="2919087"/>
+            <a:ext cx="748705" cy="637707"/>
+          </a:xfrm>
+          <a:prstGeom prst="curvedConnector3">
+            <a:avLst>
+              <a:gd name="adj1" fmla="val 50000"/>
+            </a:avLst>
+          </a:prstGeom>
+          <a:ln w="12700">
+            <a:solidFill>
+              <a:schemeClr val="accent6">
+                <a:lumMod val="75000"/>
+              </a:schemeClr>
+            </a:solidFill>
+            <a:tailEnd type="triangle"/>
+          </a:ln>
+        </p:spPr>
+        <p:style>
+          <a:lnRef idx="2">
+            <a:schemeClr val="accent1"/>
+          </a:lnRef>
+          <a:fillRef idx="0">
+            <a:schemeClr val="accent1"/>
+          </a:fillRef>
+          <a:effectRef idx="1">
+            <a:schemeClr val="accent1"/>
+          </a:effectRef>
+          <a:fontRef idx="minor">
+            <a:schemeClr val="tx1"/>
+          </a:fontRef>
+        </p:style>
+      </p:cxnSp>
+      <p:cxnSp>
+        <p:nvCxnSpPr>
+          <p:cNvPr id="41" name="연결선: 구부러짐 40">
+            <a:extLst>
+              <a:ext uri="{FF2B5EF4-FFF2-40B4-BE49-F238E27FC236}">
+                <a16:creationId xmlns:a16="http://schemas.microsoft.com/office/drawing/2014/main" id="{1CC7BB2A-6A22-A7E2-71D6-88248F5F50A4}"/>
+              </a:ext>
+            </a:extLst>
+          </p:cNvPr>
+          <p:cNvCxnSpPr>
+            <a:cxnSpLocks/>
+            <a:stCxn id="5" idx="3"/>
+            <a:endCxn id="10" idx="1"/>
+          </p:cNvCxnSpPr>
+          <p:nvPr/>
+        </p:nvCxnSpPr>
+        <p:spPr>
+          <a:xfrm flipV="1">
+            <a:off x="4212590" y="3525135"/>
+            <a:ext cx="748705" cy="31659"/>
+          </a:xfrm>
+          <a:prstGeom prst="curvedConnector3">
+            <a:avLst>
+              <a:gd name="adj1" fmla="val 50000"/>
+            </a:avLst>
+          </a:prstGeom>
+          <a:ln w="12700">
+            <a:solidFill>
+              <a:schemeClr val="accent6">
+                <a:lumMod val="75000"/>
+              </a:schemeClr>
+            </a:solidFill>
+            <a:tailEnd type="triangle"/>
+          </a:ln>
+        </p:spPr>
+        <p:style>
+          <a:lnRef idx="2">
+            <a:schemeClr val="accent1"/>
+          </a:lnRef>
+          <a:fillRef idx="0">
+            <a:schemeClr val="accent1"/>
+          </a:fillRef>
+          <a:effectRef idx="1">
+            <a:schemeClr val="accent1"/>
+          </a:effectRef>
+          <a:fontRef idx="minor">
+            <a:schemeClr val="tx1"/>
+          </a:fontRef>
+        </p:style>
+      </p:cxnSp>
+      <p:cxnSp>
+        <p:nvCxnSpPr>
+          <p:cNvPr id="44" name="연결선: 구부러짐 43">
+            <a:extLst>
+              <a:ext uri="{FF2B5EF4-FFF2-40B4-BE49-F238E27FC236}">
+                <a16:creationId xmlns:a16="http://schemas.microsoft.com/office/drawing/2014/main" id="{66109C82-81A0-28A9-1DA2-3EABEBC82E22}"/>
+              </a:ext>
+            </a:extLst>
+          </p:cNvPr>
+          <p:cNvCxnSpPr>
+            <a:cxnSpLocks/>
+            <a:stCxn id="5" idx="3"/>
+            <a:endCxn id="11" idx="1"/>
+          </p:cNvCxnSpPr>
+          <p:nvPr/>
+        </p:nvCxnSpPr>
+        <p:spPr>
+          <a:xfrm>
+            <a:off x="4212590" y="3556794"/>
+            <a:ext cx="748705" cy="574389"/>
+          </a:xfrm>
+          <a:prstGeom prst="curvedConnector3">
+            <a:avLst>
+              <a:gd name="adj1" fmla="val 50000"/>
+            </a:avLst>
+          </a:prstGeom>
+          <a:ln w="12700">
+            <a:solidFill>
+              <a:schemeClr val="accent6">
+                <a:lumMod val="75000"/>
+              </a:schemeClr>
+            </a:solidFill>
+            <a:tailEnd type="triangle"/>
+          </a:ln>
+        </p:spPr>
+        <p:style>
+          <a:lnRef idx="2">
+            <a:schemeClr val="accent1"/>
+          </a:lnRef>
+          <a:fillRef idx="0">
+            <a:schemeClr val="accent1"/>
+          </a:fillRef>
+          <a:effectRef idx="1">
+            <a:schemeClr val="accent1"/>
+          </a:effectRef>
+          <a:fontRef idx="minor">
+            <a:schemeClr val="tx1"/>
+          </a:fontRef>
+        </p:style>
+      </p:cxnSp>
+      <p:cxnSp>
+        <p:nvCxnSpPr>
+          <p:cNvPr id="47" name="연결선: 구부러짐 46">
+            <a:extLst>
+              <a:ext uri="{FF2B5EF4-FFF2-40B4-BE49-F238E27FC236}">
+                <a16:creationId xmlns:a16="http://schemas.microsoft.com/office/drawing/2014/main" id="{57E16DF2-DBE0-D6DA-BC4B-8E0E2F3E0C2F}"/>
+              </a:ext>
+            </a:extLst>
+          </p:cNvPr>
+          <p:cNvCxnSpPr>
+            <a:cxnSpLocks/>
+            <a:stCxn id="5" idx="3"/>
+            <a:endCxn id="12" idx="1"/>
+          </p:cNvCxnSpPr>
+          <p:nvPr/>
+        </p:nvCxnSpPr>
+        <p:spPr>
+          <a:xfrm>
+            <a:off x="4212590" y="3556794"/>
+            <a:ext cx="748705" cy="1180437"/>
+          </a:xfrm>
+          <a:prstGeom prst="curvedConnector3">
+            <a:avLst>
+              <a:gd name="adj1" fmla="val 50000"/>
+            </a:avLst>
+          </a:prstGeom>
+          <a:ln w="12700">
+            <a:solidFill>
+              <a:schemeClr val="accent6">
+                <a:lumMod val="75000"/>
+              </a:schemeClr>
+            </a:solidFill>
+            <a:tailEnd type="triangle"/>
+          </a:ln>
+        </p:spPr>
+        <p:style>
+          <a:lnRef idx="2">
+            <a:schemeClr val="accent1"/>
+          </a:lnRef>
+          <a:fillRef idx="0">
+            <a:schemeClr val="accent1"/>
+          </a:fillRef>
+          <a:effectRef idx="1">
+            <a:schemeClr val="accent1"/>
+          </a:effectRef>
+          <a:fontRef idx="minor">
+            <a:schemeClr val="tx1"/>
+          </a:fontRef>
+        </p:style>
+      </p:cxnSp>
+      <p:cxnSp>
+        <p:nvCxnSpPr>
+          <p:cNvPr id="50" name="연결선: 구부러짐 49">
+            <a:extLst>
+              <a:ext uri="{FF2B5EF4-FFF2-40B4-BE49-F238E27FC236}">
+                <a16:creationId xmlns:a16="http://schemas.microsoft.com/office/drawing/2014/main" id="{FCF497B6-2FA3-5A99-2FE7-A6263D378D0B}"/>
+              </a:ext>
+            </a:extLst>
+          </p:cNvPr>
+          <p:cNvCxnSpPr>
+            <a:cxnSpLocks/>
+            <a:stCxn id="5" idx="3"/>
+            <a:endCxn id="13" idx="1"/>
+          </p:cNvCxnSpPr>
+          <p:nvPr/>
+        </p:nvCxnSpPr>
+        <p:spPr>
+          <a:xfrm>
+            <a:off x="4212590" y="3556794"/>
+            <a:ext cx="748705" cy="1786485"/>
+          </a:xfrm>
+          <a:prstGeom prst="curvedConnector3">
+            <a:avLst>
+              <a:gd name="adj1" fmla="val 50000"/>
+            </a:avLst>
+          </a:prstGeom>
+          <a:ln w="12700">
+            <a:solidFill>
+              <a:schemeClr val="accent6">
+                <a:lumMod val="75000"/>
+              </a:schemeClr>
+            </a:solidFill>
+            <a:tailEnd type="triangle"/>
+          </a:ln>
+        </p:spPr>
+        <p:style>
+          <a:lnRef idx="2">
+            <a:schemeClr val="accent1"/>
+          </a:lnRef>
+          <a:fillRef idx="0">
+            <a:schemeClr val="accent1"/>
+          </a:fillRef>
+          <a:effectRef idx="1">
+            <a:schemeClr val="accent1"/>
+          </a:effectRef>
+          <a:fontRef idx="minor">
+            <a:schemeClr val="tx1"/>
+          </a:fontRef>
+        </p:style>
+      </p:cxnSp>
+      <p:cxnSp>
+        <p:nvCxnSpPr>
+          <p:cNvPr id="53" name="연결선: 구부러짐 52">
+            <a:extLst>
+              <a:ext uri="{FF2B5EF4-FFF2-40B4-BE49-F238E27FC236}">
+                <a16:creationId xmlns:a16="http://schemas.microsoft.com/office/drawing/2014/main" id="{598EE90E-81F1-75B5-9571-1AAB201BF8BC}"/>
+              </a:ext>
+            </a:extLst>
+          </p:cNvPr>
+          <p:cNvCxnSpPr>
+            <a:cxnSpLocks/>
+            <a:stCxn id="5" idx="3"/>
+            <a:endCxn id="14" idx="1"/>
+          </p:cNvCxnSpPr>
+          <p:nvPr/>
+        </p:nvCxnSpPr>
+        <p:spPr>
+          <a:xfrm>
+            <a:off x="4212590" y="3556794"/>
+            <a:ext cx="748705" cy="2392533"/>
+          </a:xfrm>
+          <a:prstGeom prst="curvedConnector3">
+            <a:avLst>
+              <a:gd name="adj1" fmla="val 50000"/>
+            </a:avLst>
+          </a:prstGeom>
+          <a:ln w="12700">
+            <a:solidFill>
+              <a:schemeClr val="accent6">
+                <a:lumMod val="75000"/>
+              </a:schemeClr>
+            </a:solidFill>
+            <a:tailEnd type="triangle"/>
+          </a:ln>
+        </p:spPr>
+        <p:style>
+          <a:lnRef idx="2">
+            <a:schemeClr val="accent1"/>
+          </a:lnRef>
+          <a:fillRef idx="0">
+            <a:schemeClr val="accent1"/>
+          </a:fillRef>
+          <a:effectRef idx="1">
+            <a:schemeClr val="accent1"/>
+          </a:effectRef>
+          <a:fontRef idx="minor">
+            <a:schemeClr val="tx1"/>
+          </a:fontRef>
+        </p:style>
+      </p:cxnSp>
+      <p:sp>
+        <p:nvSpPr>
+          <p:cNvPr id="6" name="직사각형 5">
+            <a:extLst>
+              <a:ext uri="{FF2B5EF4-FFF2-40B4-BE49-F238E27FC236}">
+                <a16:creationId xmlns:a16="http://schemas.microsoft.com/office/drawing/2014/main" id="{859BDC85-BC35-D651-650F-CBA1BED0A76D}"/>
+              </a:ext>
+            </a:extLst>
+          </p:cNvPr>
+          <p:cNvSpPr/>
+          <p:nvPr/>
+        </p:nvSpPr>
+        <p:spPr>
+          <a:xfrm>
+            <a:off x="4961295" y="973149"/>
+            <a:ext cx="520700" cy="255587"/>
+          </a:xfrm>
+          <a:prstGeom prst="rect">
+            <a:avLst/>
+          </a:prstGeom>
+          <a:solidFill>
+            <a:schemeClr val="tx2">
+              <a:lumMod val="10000"/>
+              <a:lumOff val="90000"/>
+            </a:schemeClr>
+          </a:solidFill>
+          <a:ln w="12700"/>
+        </p:spPr>
+        <p:style>
+          <a:lnRef idx="2">
+            <a:schemeClr val="accent1">
+              <a:shade val="15000"/>
+            </a:schemeClr>
+          </a:lnRef>
+          <a:fillRef idx="1">
+            <a:schemeClr val="accent1"/>
+          </a:fillRef>
+          <a:effectRef idx="0">
+            <a:schemeClr val="accent1"/>
+          </a:effectRef>
+          <a:fontRef idx="minor">
+            <a:schemeClr val="lt1"/>
+          </a:fontRef>
+        </p:style>
+        <p:txBody>
+          <a:bodyPr rtlCol="0" anchor="ctr"/>
+          <a:lstStyle/>
+          <a:p>
+            <a:pPr algn="ctr"/>
+            <a:r>
+              <a:rPr lang="en-US" altLang="ko-KR" sz="1100" dirty="0">
+                <a:solidFill>
+                  <a:sysClr val="windowText" lastClr="000000"/>
+                </a:solidFill>
+              </a:rPr>
+              <a:t>DFF1</a:t>
+            </a:r>
+            <a:endParaRPr lang="ko-KR" altLang="en-US" sz="1100" dirty="0">
+              <a:solidFill>
+                <a:sysClr val="windowText" lastClr="000000"/>
+              </a:solidFill>
+            </a:endParaRPr>
+          </a:p>
+        </p:txBody>
+      </p:sp>
+      <p:sp>
+        <p:nvSpPr>
+          <p:cNvPr id="7" name="직사각형 6">
+            <a:extLst>
+              <a:ext uri="{FF2B5EF4-FFF2-40B4-BE49-F238E27FC236}">
+                <a16:creationId xmlns:a16="http://schemas.microsoft.com/office/drawing/2014/main" id="{06FD02D9-E766-105A-6257-1A9C167087CC}"/>
+              </a:ext>
+            </a:extLst>
+          </p:cNvPr>
+          <p:cNvSpPr/>
+          <p:nvPr/>
+        </p:nvSpPr>
+        <p:spPr>
+          <a:xfrm>
+            <a:off x="4961295" y="1579197"/>
+            <a:ext cx="520700" cy="255587"/>
+          </a:xfrm>
+          <a:prstGeom prst="rect">
+            <a:avLst/>
+          </a:prstGeom>
+          <a:solidFill>
+            <a:schemeClr val="tx2">
+              <a:lumMod val="10000"/>
+              <a:lumOff val="90000"/>
+            </a:schemeClr>
+          </a:solidFill>
+          <a:ln w="12700"/>
+        </p:spPr>
+        <p:style>
+          <a:lnRef idx="2">
+            <a:schemeClr val="accent1">
+              <a:shade val="15000"/>
+            </a:schemeClr>
+          </a:lnRef>
+          <a:fillRef idx="1">
+            <a:schemeClr val="accent1"/>
+          </a:fillRef>
+          <a:effectRef idx="0">
+            <a:schemeClr val="accent1"/>
+          </a:effectRef>
+          <a:fontRef idx="minor">
+            <a:schemeClr val="lt1"/>
+          </a:fontRef>
+        </p:style>
+        <p:txBody>
+          <a:bodyPr rtlCol="0" anchor="ctr"/>
+          <a:lstStyle/>
+          <a:p>
+            <a:pPr algn="ctr"/>
+            <a:r>
+              <a:rPr lang="en-US" altLang="ko-KR" sz="1100" dirty="0">
+                <a:solidFill>
+                  <a:sysClr val="windowText" lastClr="000000"/>
+                </a:solidFill>
+              </a:rPr>
+              <a:t>DFF2</a:t>
+            </a:r>
+            <a:endParaRPr lang="ko-KR" altLang="en-US" sz="1100" dirty="0">
+              <a:solidFill>
+                <a:sysClr val="windowText" lastClr="000000"/>
+              </a:solidFill>
+            </a:endParaRPr>
+          </a:p>
+        </p:txBody>
+      </p:sp>
+      <p:sp>
+        <p:nvSpPr>
+          <p:cNvPr id="8" name="직사각형 7">
+            <a:extLst>
+              <a:ext uri="{FF2B5EF4-FFF2-40B4-BE49-F238E27FC236}">
+                <a16:creationId xmlns:a16="http://schemas.microsoft.com/office/drawing/2014/main" id="{89B3133C-7C71-15CC-F679-D91B2795EB7B}"/>
+              </a:ext>
+            </a:extLst>
+          </p:cNvPr>
+          <p:cNvSpPr/>
+          <p:nvPr/>
+        </p:nvSpPr>
+        <p:spPr>
+          <a:xfrm>
+            <a:off x="4961295" y="2185245"/>
+            <a:ext cx="520700" cy="255587"/>
+          </a:xfrm>
+          <a:prstGeom prst="rect">
+            <a:avLst/>
+          </a:prstGeom>
+          <a:solidFill>
+            <a:schemeClr val="tx2">
+              <a:lumMod val="10000"/>
+              <a:lumOff val="90000"/>
+            </a:schemeClr>
+          </a:solidFill>
+          <a:ln w="12700"/>
+        </p:spPr>
+        <p:style>
+          <a:lnRef idx="2">
+            <a:schemeClr val="accent1">
+              <a:shade val="15000"/>
+            </a:schemeClr>
+          </a:lnRef>
+          <a:fillRef idx="1">
+            <a:schemeClr val="accent1"/>
+          </a:fillRef>
+          <a:effectRef idx="0">
+            <a:schemeClr val="accent1"/>
+          </a:effectRef>
+          <a:fontRef idx="minor">
+            <a:schemeClr val="lt1"/>
+          </a:fontRef>
+        </p:style>
+        <p:txBody>
+          <a:bodyPr rtlCol="0" anchor="ctr"/>
+          <a:lstStyle/>
+          <a:p>
+            <a:pPr algn="ctr"/>
+            <a:r>
+              <a:rPr lang="en-US" altLang="ko-KR" sz="1100" dirty="0">
+                <a:solidFill>
+                  <a:sysClr val="windowText" lastClr="000000"/>
+                </a:solidFill>
+              </a:rPr>
+              <a:t>DFF3</a:t>
+            </a:r>
+            <a:endParaRPr lang="ko-KR" altLang="en-US" sz="1100" dirty="0">
+              <a:solidFill>
+                <a:sysClr val="windowText" lastClr="000000"/>
+              </a:solidFill>
+            </a:endParaRPr>
+          </a:p>
+        </p:txBody>
+      </p:sp>
+      <p:sp>
+        <p:nvSpPr>
+          <p:cNvPr id="9" name="직사각형 8">
+            <a:extLst>
+              <a:ext uri="{FF2B5EF4-FFF2-40B4-BE49-F238E27FC236}">
+                <a16:creationId xmlns:a16="http://schemas.microsoft.com/office/drawing/2014/main" id="{F8A7D54C-E638-95E5-8834-B710FED1A9A8}"/>
+              </a:ext>
+            </a:extLst>
+          </p:cNvPr>
+          <p:cNvSpPr/>
+          <p:nvPr/>
+        </p:nvSpPr>
+        <p:spPr>
+          <a:xfrm>
+            <a:off x="4961295" y="2791293"/>
+            <a:ext cx="520700" cy="255587"/>
+          </a:xfrm>
+          <a:prstGeom prst="rect">
+            <a:avLst/>
+          </a:prstGeom>
+          <a:solidFill>
+            <a:schemeClr val="tx2">
+              <a:lumMod val="10000"/>
+              <a:lumOff val="90000"/>
+            </a:schemeClr>
+          </a:solidFill>
+          <a:ln w="12700"/>
+        </p:spPr>
+        <p:style>
+          <a:lnRef idx="2">
+            <a:schemeClr val="accent1">
+              <a:shade val="15000"/>
+            </a:schemeClr>
+          </a:lnRef>
+          <a:fillRef idx="1">
+            <a:schemeClr val="accent1"/>
+          </a:fillRef>
+          <a:effectRef idx="0">
+            <a:schemeClr val="accent1"/>
+          </a:effectRef>
+          <a:fontRef idx="minor">
+            <a:schemeClr val="lt1"/>
+          </a:fontRef>
+        </p:style>
+        <p:txBody>
+          <a:bodyPr rtlCol="0" anchor="ctr"/>
+          <a:lstStyle/>
+          <a:p>
+            <a:pPr algn="ctr"/>
+            <a:r>
+              <a:rPr lang="en-US" altLang="ko-KR" sz="1100" dirty="0">
+                <a:solidFill>
+                  <a:sysClr val="windowText" lastClr="000000"/>
+                </a:solidFill>
+              </a:rPr>
+              <a:t>DFF4</a:t>
+            </a:r>
+            <a:endParaRPr lang="ko-KR" altLang="en-US" sz="1100" dirty="0">
+              <a:solidFill>
+                <a:sysClr val="windowText" lastClr="000000"/>
+              </a:solidFill>
+            </a:endParaRPr>
+          </a:p>
+        </p:txBody>
+      </p:sp>
+      <p:sp>
+        <p:nvSpPr>
+          <p:cNvPr id="10" name="직사각형 9">
+            <a:extLst>
+              <a:ext uri="{FF2B5EF4-FFF2-40B4-BE49-F238E27FC236}">
+                <a16:creationId xmlns:a16="http://schemas.microsoft.com/office/drawing/2014/main" id="{E141834D-938B-9643-89FF-3257A79145F3}"/>
+              </a:ext>
+            </a:extLst>
+          </p:cNvPr>
+          <p:cNvSpPr/>
+          <p:nvPr/>
+        </p:nvSpPr>
+        <p:spPr>
+          <a:xfrm>
+            <a:off x="4961295" y="3397341"/>
+            <a:ext cx="520700" cy="255587"/>
+          </a:xfrm>
+          <a:prstGeom prst="rect">
+            <a:avLst/>
+          </a:prstGeom>
+          <a:solidFill>
+            <a:schemeClr val="tx2">
+              <a:lumMod val="10000"/>
+              <a:lumOff val="90000"/>
+            </a:schemeClr>
+          </a:solidFill>
+          <a:ln w="12700"/>
+        </p:spPr>
+        <p:style>
+          <a:lnRef idx="2">
+            <a:schemeClr val="accent1">
+              <a:shade val="15000"/>
+            </a:schemeClr>
+          </a:lnRef>
+          <a:fillRef idx="1">
+            <a:schemeClr val="accent1"/>
+          </a:fillRef>
+          <a:effectRef idx="0">
+            <a:schemeClr val="accent1"/>
+          </a:effectRef>
+          <a:fontRef idx="minor">
+            <a:schemeClr val="lt1"/>
+          </a:fontRef>
+        </p:style>
+        <p:txBody>
+          <a:bodyPr rtlCol="0" anchor="ctr"/>
+          <a:lstStyle/>
+          <a:p>
+            <a:pPr algn="ctr"/>
+            <a:r>
+              <a:rPr lang="en-US" altLang="ko-KR" sz="1100" dirty="0">
+                <a:solidFill>
+                  <a:sysClr val="windowText" lastClr="000000"/>
+                </a:solidFill>
+              </a:rPr>
+              <a:t>DFF5</a:t>
+            </a:r>
+            <a:endParaRPr lang="ko-KR" altLang="en-US" sz="1100" dirty="0">
+              <a:solidFill>
+                <a:sysClr val="windowText" lastClr="000000"/>
+              </a:solidFill>
+            </a:endParaRPr>
+          </a:p>
+        </p:txBody>
+      </p:sp>
+      <p:sp>
+        <p:nvSpPr>
+          <p:cNvPr id="11" name="직사각형 10">
+            <a:extLst>
+              <a:ext uri="{FF2B5EF4-FFF2-40B4-BE49-F238E27FC236}">
+                <a16:creationId xmlns:a16="http://schemas.microsoft.com/office/drawing/2014/main" id="{32C843E5-16D0-E8CC-F0CB-267C77396619}"/>
+              </a:ext>
+            </a:extLst>
+          </p:cNvPr>
+          <p:cNvSpPr/>
+          <p:nvPr/>
+        </p:nvSpPr>
+        <p:spPr>
+          <a:xfrm>
+            <a:off x="4961295" y="4003389"/>
+            <a:ext cx="520700" cy="255587"/>
+          </a:xfrm>
+          <a:prstGeom prst="rect">
+            <a:avLst/>
+          </a:prstGeom>
+          <a:solidFill>
+            <a:schemeClr val="tx2">
+              <a:lumMod val="10000"/>
+              <a:lumOff val="90000"/>
+            </a:schemeClr>
+          </a:solidFill>
+          <a:ln w="12700"/>
+        </p:spPr>
+        <p:style>
+          <a:lnRef idx="2">
+            <a:schemeClr val="accent1">
+              <a:shade val="15000"/>
+            </a:schemeClr>
+          </a:lnRef>
+          <a:fillRef idx="1">
+            <a:schemeClr val="accent1"/>
+          </a:fillRef>
+          <a:effectRef idx="0">
+            <a:schemeClr val="accent1"/>
+          </a:effectRef>
+          <a:fontRef idx="minor">
+            <a:schemeClr val="lt1"/>
+          </a:fontRef>
+        </p:style>
+        <p:txBody>
+          <a:bodyPr rtlCol="0" anchor="ctr"/>
+          <a:lstStyle/>
+          <a:p>
+            <a:pPr algn="ctr"/>
+            <a:r>
+              <a:rPr lang="en-US" altLang="ko-KR" sz="1100" dirty="0">
+                <a:solidFill>
+                  <a:sysClr val="windowText" lastClr="000000"/>
+                </a:solidFill>
+              </a:rPr>
+              <a:t>DFF6</a:t>
+            </a:r>
+            <a:endParaRPr lang="ko-KR" altLang="en-US" sz="1100" dirty="0">
+              <a:solidFill>
+                <a:sysClr val="windowText" lastClr="000000"/>
+              </a:solidFill>
+            </a:endParaRPr>
+          </a:p>
+        </p:txBody>
+      </p:sp>
+      <p:sp>
+        <p:nvSpPr>
+          <p:cNvPr id="12" name="직사각형 11">
+            <a:extLst>
+              <a:ext uri="{FF2B5EF4-FFF2-40B4-BE49-F238E27FC236}">
+                <a16:creationId xmlns:a16="http://schemas.microsoft.com/office/drawing/2014/main" id="{E66DE27D-9654-9CD6-4EB6-FAB7B62FC19D}"/>
+              </a:ext>
+            </a:extLst>
+          </p:cNvPr>
+          <p:cNvSpPr/>
+          <p:nvPr/>
+        </p:nvSpPr>
+        <p:spPr>
+          <a:xfrm>
+            <a:off x="4961295" y="4609437"/>
+            <a:ext cx="520700" cy="255587"/>
+          </a:xfrm>
+          <a:prstGeom prst="rect">
+            <a:avLst/>
+          </a:prstGeom>
+          <a:solidFill>
+            <a:schemeClr val="tx2">
+              <a:lumMod val="10000"/>
+              <a:lumOff val="90000"/>
+            </a:schemeClr>
+          </a:solidFill>
+          <a:ln w="12700"/>
+        </p:spPr>
+        <p:style>
+          <a:lnRef idx="2">
+            <a:schemeClr val="accent1">
+              <a:shade val="15000"/>
+            </a:schemeClr>
+          </a:lnRef>
+          <a:fillRef idx="1">
+            <a:schemeClr val="accent1"/>
+          </a:fillRef>
+          <a:effectRef idx="0">
+            <a:schemeClr val="accent1"/>
+          </a:effectRef>
+          <a:fontRef idx="minor">
+            <a:schemeClr val="lt1"/>
+          </a:fontRef>
+        </p:style>
+        <p:txBody>
+          <a:bodyPr rtlCol="0" anchor="ctr"/>
+          <a:lstStyle/>
+          <a:p>
+            <a:pPr algn="ctr"/>
+            <a:r>
+              <a:rPr lang="en-US" altLang="ko-KR" sz="1100" dirty="0">
+                <a:solidFill>
+                  <a:sysClr val="windowText" lastClr="000000"/>
+                </a:solidFill>
+              </a:rPr>
+              <a:t>DFF7</a:t>
+            </a:r>
+            <a:endParaRPr lang="ko-KR" altLang="en-US" sz="1100" dirty="0">
+              <a:solidFill>
+                <a:sysClr val="windowText" lastClr="000000"/>
+              </a:solidFill>
+            </a:endParaRPr>
+          </a:p>
+        </p:txBody>
+      </p:sp>
+      <p:sp>
+        <p:nvSpPr>
+          <p:cNvPr id="13" name="직사각형 12">
+            <a:extLst>
+              <a:ext uri="{FF2B5EF4-FFF2-40B4-BE49-F238E27FC236}">
+                <a16:creationId xmlns:a16="http://schemas.microsoft.com/office/drawing/2014/main" id="{7CE332B6-CC47-F42A-7418-212138E37E91}"/>
+              </a:ext>
+            </a:extLst>
+          </p:cNvPr>
+          <p:cNvSpPr/>
+          <p:nvPr/>
+        </p:nvSpPr>
+        <p:spPr>
+          <a:xfrm>
+            <a:off x="4961295" y="5215485"/>
+            <a:ext cx="520700" cy="255587"/>
+          </a:xfrm>
+          <a:prstGeom prst="rect">
+            <a:avLst/>
+          </a:prstGeom>
+          <a:solidFill>
+            <a:schemeClr val="tx2">
+              <a:lumMod val="10000"/>
+              <a:lumOff val="90000"/>
+            </a:schemeClr>
+          </a:solidFill>
+          <a:ln w="12700"/>
+        </p:spPr>
+        <p:style>
+          <a:lnRef idx="2">
+            <a:schemeClr val="accent1">
+              <a:shade val="15000"/>
+            </a:schemeClr>
+          </a:lnRef>
+          <a:fillRef idx="1">
+            <a:schemeClr val="accent1"/>
+          </a:fillRef>
+          <a:effectRef idx="0">
+            <a:schemeClr val="accent1"/>
+          </a:effectRef>
+          <a:fontRef idx="minor">
+            <a:schemeClr val="lt1"/>
+          </a:fontRef>
+        </p:style>
+        <p:txBody>
+          <a:bodyPr rtlCol="0" anchor="ctr"/>
+          <a:lstStyle/>
+          <a:p>
+            <a:pPr algn="ctr"/>
+            <a:r>
+              <a:rPr lang="en-US" altLang="ko-KR" sz="1100" dirty="0">
+                <a:solidFill>
+                  <a:sysClr val="windowText" lastClr="000000"/>
+                </a:solidFill>
+              </a:rPr>
+              <a:t>DFF8</a:t>
+            </a:r>
+            <a:endParaRPr lang="ko-KR" altLang="en-US" sz="1100" dirty="0">
+              <a:solidFill>
+                <a:sysClr val="windowText" lastClr="000000"/>
+              </a:solidFill>
+            </a:endParaRPr>
+          </a:p>
+        </p:txBody>
+      </p:sp>
+      <p:sp>
+        <p:nvSpPr>
+          <p:cNvPr id="14" name="직사각형 13">
+            <a:extLst>
+              <a:ext uri="{FF2B5EF4-FFF2-40B4-BE49-F238E27FC236}">
+                <a16:creationId xmlns:a16="http://schemas.microsoft.com/office/drawing/2014/main" id="{8844895F-ECBD-515C-EBA0-714301736EE5}"/>
+              </a:ext>
+            </a:extLst>
+          </p:cNvPr>
+          <p:cNvSpPr/>
+          <p:nvPr/>
+        </p:nvSpPr>
+        <p:spPr>
+          <a:xfrm>
+            <a:off x="4961295" y="5821533"/>
+            <a:ext cx="520700" cy="255587"/>
+          </a:xfrm>
+          <a:prstGeom prst="rect">
+            <a:avLst/>
+          </a:prstGeom>
+          <a:solidFill>
+            <a:schemeClr val="tx2">
+              <a:lumMod val="10000"/>
+              <a:lumOff val="90000"/>
+            </a:schemeClr>
+          </a:solidFill>
+          <a:ln w="12700"/>
+        </p:spPr>
+        <p:style>
+          <a:lnRef idx="2">
+            <a:schemeClr val="accent1">
+              <a:shade val="15000"/>
+            </a:schemeClr>
+          </a:lnRef>
+          <a:fillRef idx="1">
+            <a:schemeClr val="accent1"/>
+          </a:fillRef>
+          <a:effectRef idx="0">
+            <a:schemeClr val="accent1"/>
+          </a:effectRef>
+          <a:fontRef idx="minor">
+            <a:schemeClr val="lt1"/>
+          </a:fontRef>
+        </p:style>
+        <p:txBody>
+          <a:bodyPr rtlCol="0" anchor="ctr"/>
+          <a:lstStyle/>
+          <a:p>
+            <a:pPr algn="ctr"/>
+            <a:r>
+              <a:rPr lang="en-US" altLang="ko-KR" sz="1100" dirty="0">
+                <a:solidFill>
+                  <a:sysClr val="windowText" lastClr="000000"/>
+                </a:solidFill>
+              </a:rPr>
+              <a:t>DFF9</a:t>
+            </a:r>
+            <a:endParaRPr lang="ko-KR" altLang="en-US" sz="1100" dirty="0">
+              <a:solidFill>
+                <a:sysClr val="windowText" lastClr="000000"/>
+              </a:solidFill>
+            </a:endParaRPr>
+          </a:p>
+        </p:txBody>
+      </p:sp>
+      <p:cxnSp>
+        <p:nvCxnSpPr>
+          <p:cNvPr id="97" name="직선 화살표 연결선 96">
+            <a:extLst>
+              <a:ext uri="{FF2B5EF4-FFF2-40B4-BE49-F238E27FC236}">
+                <a16:creationId xmlns:a16="http://schemas.microsoft.com/office/drawing/2014/main" id="{59FF3706-0F14-5006-4414-48E570ABF7CC}"/>
+              </a:ext>
+            </a:extLst>
+          </p:cNvPr>
+          <p:cNvCxnSpPr>
+            <a:cxnSpLocks/>
+            <a:stCxn id="4" idx="3"/>
+          </p:cNvCxnSpPr>
+          <p:nvPr/>
+        </p:nvCxnSpPr>
+        <p:spPr>
+          <a:xfrm>
+            <a:off x="2420618" y="3554256"/>
+            <a:ext cx="152400" cy="0"/>
+          </a:xfrm>
+          <a:prstGeom prst="straightConnector1">
+            <a:avLst/>
+          </a:prstGeom>
+          <a:ln w="12700">
+            <a:solidFill>
+              <a:schemeClr val="tx1"/>
+            </a:solidFill>
+            <a:tailEnd type="triangle"/>
+          </a:ln>
+        </p:spPr>
+        <p:style>
+          <a:lnRef idx="2">
+            <a:schemeClr val="accent1"/>
+          </a:lnRef>
+          <a:fillRef idx="0">
+            <a:schemeClr val="accent1"/>
+          </a:fillRef>
+          <a:effectRef idx="1">
+            <a:schemeClr val="accent1"/>
+          </a:effectRef>
+          <a:fontRef idx="minor">
+            <a:schemeClr val="tx1"/>
+          </a:fontRef>
+        </p:style>
+      </p:cxnSp>
+      <p:cxnSp>
+        <p:nvCxnSpPr>
+          <p:cNvPr id="98" name="직선 화살표 연결선 97">
+            <a:extLst>
+              <a:ext uri="{FF2B5EF4-FFF2-40B4-BE49-F238E27FC236}">
+                <a16:creationId xmlns:a16="http://schemas.microsoft.com/office/drawing/2014/main" id="{5499E9EA-5443-03A0-2BE2-6C7D16AF5DA1}"/>
+              </a:ext>
+            </a:extLst>
+          </p:cNvPr>
+          <p:cNvCxnSpPr>
+            <a:cxnSpLocks/>
+            <a:stCxn id="3" idx="3"/>
+            <a:endCxn id="4" idx="1"/>
+          </p:cNvCxnSpPr>
+          <p:nvPr/>
+        </p:nvCxnSpPr>
+        <p:spPr>
+          <a:xfrm flipV="1">
+            <a:off x="1836418" y="3554256"/>
+            <a:ext cx="152400" cy="1"/>
+          </a:xfrm>
+          <a:prstGeom prst="straightConnector1">
+            <a:avLst/>
+          </a:prstGeom>
+          <a:ln w="12700">
+            <a:solidFill>
+              <a:schemeClr val="tx1"/>
+            </a:solidFill>
+            <a:tailEnd type="triangle"/>
+          </a:ln>
+        </p:spPr>
+        <p:style>
+          <a:lnRef idx="2">
+            <a:schemeClr val="accent1"/>
+          </a:lnRef>
+          <a:fillRef idx="0">
+            <a:schemeClr val="accent1"/>
+          </a:fillRef>
+          <a:effectRef idx="1">
+            <a:schemeClr val="accent1"/>
+          </a:effectRef>
+          <a:fontRef idx="minor">
+            <a:schemeClr val="tx1"/>
+          </a:fontRef>
+        </p:style>
+      </p:cxnSp>
+      <p:cxnSp>
+        <p:nvCxnSpPr>
+          <p:cNvPr id="101" name="직선 화살표 연결선 100">
+            <a:extLst>
+              <a:ext uri="{FF2B5EF4-FFF2-40B4-BE49-F238E27FC236}">
+                <a16:creationId xmlns:a16="http://schemas.microsoft.com/office/drawing/2014/main" id="{7C63A99A-B260-3020-ABB4-DA85F839F37B}"/>
+              </a:ext>
+            </a:extLst>
+          </p:cNvPr>
+          <p:cNvCxnSpPr>
+            <a:cxnSpLocks/>
+            <a:stCxn id="2" idx="3"/>
+            <a:endCxn id="3" idx="1"/>
+          </p:cNvCxnSpPr>
+          <p:nvPr/>
+        </p:nvCxnSpPr>
+        <p:spPr>
+          <a:xfrm flipV="1">
+            <a:off x="966468" y="3554257"/>
+            <a:ext cx="152400" cy="3615"/>
+          </a:xfrm>
+          <a:prstGeom prst="straightConnector1">
+            <a:avLst/>
+          </a:prstGeom>
+          <a:ln w="12700">
+            <a:solidFill>
+              <a:schemeClr val="tx1"/>
+            </a:solidFill>
+            <a:tailEnd type="triangle"/>
+          </a:ln>
+        </p:spPr>
+        <p:style>
+          <a:lnRef idx="2">
+            <a:schemeClr val="accent1"/>
+          </a:lnRef>
+          <a:fillRef idx="0">
+            <a:schemeClr val="accent1"/>
+          </a:fillRef>
+          <a:effectRef idx="1">
+            <a:schemeClr val="accent1"/>
+          </a:effectRef>
+          <a:fontRef idx="minor">
+            <a:schemeClr val="tx1"/>
+          </a:fontRef>
+        </p:style>
+      </p:cxnSp>
+      <p:sp>
+        <p:nvSpPr>
+          <p:cNvPr id="106" name="직사각형 105">
+            <a:extLst>
+              <a:ext uri="{FF2B5EF4-FFF2-40B4-BE49-F238E27FC236}">
+                <a16:creationId xmlns:a16="http://schemas.microsoft.com/office/drawing/2014/main" id="{335632CC-000B-B8BD-68E8-DAAF304289ED}"/>
+              </a:ext>
+            </a:extLst>
+          </p:cNvPr>
+          <p:cNvSpPr/>
+          <p:nvPr/>
+        </p:nvSpPr>
+        <p:spPr>
+          <a:xfrm>
+            <a:off x="6345595" y="1773675"/>
+            <a:ext cx="520700" cy="255587"/>
+          </a:xfrm>
+          <a:prstGeom prst="rect">
+            <a:avLst/>
+          </a:prstGeom>
+          <a:solidFill>
+            <a:schemeClr val="accent3">
+              <a:lumMod val="20000"/>
+              <a:lumOff val="80000"/>
+            </a:schemeClr>
+          </a:solidFill>
+          <a:ln w="12700"/>
+        </p:spPr>
+        <p:style>
+          <a:lnRef idx="2">
+            <a:schemeClr val="accent1">
+              <a:shade val="15000"/>
+            </a:schemeClr>
+          </a:lnRef>
+          <a:fillRef idx="1">
+            <a:schemeClr val="accent1"/>
+          </a:fillRef>
+          <a:effectRef idx="0">
+            <a:schemeClr val="accent1"/>
+          </a:effectRef>
+          <a:fontRef idx="minor">
+            <a:schemeClr val="lt1"/>
+          </a:fontRef>
+        </p:style>
+        <p:txBody>
+          <a:bodyPr rtlCol="0" anchor="ctr"/>
+          <a:lstStyle/>
+          <a:p>
+            <a:pPr algn="ctr"/>
+            <a:r>
+              <a:rPr lang="en-US" altLang="ko-KR" sz="1100" dirty="0">
+                <a:solidFill>
+                  <a:sysClr val="windowText" lastClr="000000"/>
+                </a:solidFill>
+              </a:rPr>
+              <a:t>FPU1</a:t>
+            </a:r>
+            <a:endParaRPr lang="ko-KR" altLang="en-US" sz="1100" dirty="0">
+              <a:solidFill>
+                <a:sysClr val="windowText" lastClr="000000"/>
+              </a:solidFill>
+            </a:endParaRPr>
+          </a:p>
+        </p:txBody>
+      </p:sp>
+      <p:sp>
+        <p:nvSpPr>
+          <p:cNvPr id="107" name="직사각형 106">
+            <a:extLst>
+              <a:ext uri="{FF2B5EF4-FFF2-40B4-BE49-F238E27FC236}">
+                <a16:creationId xmlns:a16="http://schemas.microsoft.com/office/drawing/2014/main" id="{9D575813-4FD2-787D-38C0-F3E23B1FB0C0}"/>
+              </a:ext>
+            </a:extLst>
+          </p:cNvPr>
+          <p:cNvSpPr/>
+          <p:nvPr/>
+        </p:nvSpPr>
+        <p:spPr>
+          <a:xfrm>
+            <a:off x="6345595" y="3551810"/>
+            <a:ext cx="520700" cy="255587"/>
+          </a:xfrm>
+          <a:prstGeom prst="rect">
+            <a:avLst/>
+          </a:prstGeom>
+          <a:solidFill>
+            <a:schemeClr val="accent3">
+              <a:lumMod val="20000"/>
+              <a:lumOff val="80000"/>
+            </a:schemeClr>
+          </a:solidFill>
+          <a:ln w="12700"/>
+        </p:spPr>
+        <p:style>
+          <a:lnRef idx="2">
+            <a:schemeClr val="accent1">
+              <a:shade val="15000"/>
+            </a:schemeClr>
+          </a:lnRef>
+          <a:fillRef idx="1">
+            <a:schemeClr val="accent1"/>
+          </a:fillRef>
+          <a:effectRef idx="0">
+            <a:schemeClr val="accent1"/>
+          </a:effectRef>
+          <a:fontRef idx="minor">
+            <a:schemeClr val="lt1"/>
+          </a:fontRef>
+        </p:style>
+        <p:txBody>
+          <a:bodyPr rtlCol="0" anchor="ctr"/>
+          <a:lstStyle/>
+          <a:p>
+            <a:pPr algn="ctr"/>
+            <a:r>
+              <a:rPr lang="en-US" altLang="ko-KR" sz="1100" dirty="0">
+                <a:solidFill>
+                  <a:sysClr val="windowText" lastClr="000000"/>
+                </a:solidFill>
+              </a:rPr>
+              <a:t>FPU2</a:t>
+            </a:r>
+            <a:endParaRPr lang="ko-KR" altLang="en-US" sz="1100" dirty="0">
+              <a:solidFill>
+                <a:sysClr val="windowText" lastClr="000000"/>
+              </a:solidFill>
+            </a:endParaRPr>
+          </a:p>
+        </p:txBody>
+      </p:sp>
+      <p:sp>
+        <p:nvSpPr>
+          <p:cNvPr id="108" name="직사각형 107">
+            <a:extLst>
+              <a:ext uri="{FF2B5EF4-FFF2-40B4-BE49-F238E27FC236}">
+                <a16:creationId xmlns:a16="http://schemas.microsoft.com/office/drawing/2014/main" id="{5CBC7DD5-28BA-2B8D-1754-4A3554494222}"/>
+              </a:ext>
+            </a:extLst>
+          </p:cNvPr>
+          <p:cNvSpPr/>
+          <p:nvPr/>
+        </p:nvSpPr>
+        <p:spPr>
+          <a:xfrm>
+            <a:off x="6345595" y="5329945"/>
+            <a:ext cx="520700" cy="255587"/>
+          </a:xfrm>
+          <a:prstGeom prst="rect">
+            <a:avLst/>
+          </a:prstGeom>
+          <a:solidFill>
+            <a:schemeClr val="accent3">
+              <a:lumMod val="20000"/>
+              <a:lumOff val="80000"/>
+            </a:schemeClr>
+          </a:solidFill>
+          <a:ln w="12700"/>
+        </p:spPr>
+        <p:style>
+          <a:lnRef idx="2">
+            <a:schemeClr val="accent1">
+              <a:shade val="15000"/>
+            </a:schemeClr>
+          </a:lnRef>
+          <a:fillRef idx="1">
+            <a:schemeClr val="accent1"/>
+          </a:fillRef>
+          <a:effectRef idx="0">
+            <a:schemeClr val="accent1"/>
+          </a:effectRef>
+          <a:fontRef idx="minor">
+            <a:schemeClr val="lt1"/>
+          </a:fontRef>
+        </p:style>
+        <p:txBody>
+          <a:bodyPr rtlCol="0" anchor="ctr"/>
+          <a:lstStyle/>
+          <a:p>
+            <a:pPr algn="ctr"/>
+            <a:r>
+              <a:rPr lang="en-US" altLang="ko-KR" sz="1100" dirty="0">
+                <a:solidFill>
+                  <a:sysClr val="windowText" lastClr="000000"/>
+                </a:solidFill>
+              </a:rPr>
+              <a:t>FPU3</a:t>
+            </a:r>
+            <a:endParaRPr lang="ko-KR" altLang="en-US" sz="1100" dirty="0">
+              <a:solidFill>
+                <a:sysClr val="windowText" lastClr="000000"/>
+              </a:solidFill>
+            </a:endParaRPr>
+          </a:p>
+        </p:txBody>
+      </p:sp>
+      <p:cxnSp>
+        <p:nvCxnSpPr>
+          <p:cNvPr id="142" name="연결선: 구부러짐 141">
+            <a:extLst>
+              <a:ext uri="{FF2B5EF4-FFF2-40B4-BE49-F238E27FC236}">
+                <a16:creationId xmlns:a16="http://schemas.microsoft.com/office/drawing/2014/main" id="{E28C03DC-D02F-1E83-043D-212007D8187E}"/>
+              </a:ext>
+            </a:extLst>
+          </p:cNvPr>
+          <p:cNvCxnSpPr>
+            <a:cxnSpLocks/>
+            <a:stCxn id="17" idx="3"/>
+            <a:endCxn id="106" idx="1"/>
+          </p:cNvCxnSpPr>
+          <p:nvPr/>
+        </p:nvCxnSpPr>
+        <p:spPr>
+          <a:xfrm>
+            <a:off x="5913795" y="1403967"/>
+            <a:ext cx="431800" cy="497502"/>
+          </a:xfrm>
+          <a:prstGeom prst="curvedConnector3">
+            <a:avLst>
+              <a:gd name="adj1" fmla="val 50000"/>
+            </a:avLst>
+          </a:prstGeom>
+          <a:ln w="12700">
+            <a:solidFill>
+              <a:schemeClr val="accent2"/>
+            </a:solidFill>
+            <a:tailEnd type="triangle"/>
+          </a:ln>
+        </p:spPr>
+        <p:style>
+          <a:lnRef idx="2">
+            <a:schemeClr val="accent1"/>
+          </a:lnRef>
+          <a:fillRef idx="0">
+            <a:schemeClr val="accent1"/>
+          </a:fillRef>
+          <a:effectRef idx="1">
+            <a:schemeClr val="accent1"/>
+          </a:effectRef>
+          <a:fontRef idx="minor">
+            <a:schemeClr val="tx1"/>
+          </a:fontRef>
+        </p:style>
+      </p:cxnSp>
+      <p:cxnSp>
+        <p:nvCxnSpPr>
+          <p:cNvPr id="146" name="연결선: 구부러짐 145">
+            <a:extLst>
+              <a:ext uri="{FF2B5EF4-FFF2-40B4-BE49-F238E27FC236}">
+                <a16:creationId xmlns:a16="http://schemas.microsoft.com/office/drawing/2014/main" id="{3B651FF4-8AF5-09B5-9BD2-3069873F5089}"/>
+              </a:ext>
+            </a:extLst>
+          </p:cNvPr>
+          <p:cNvCxnSpPr>
+            <a:cxnSpLocks/>
+            <a:stCxn id="18" idx="3"/>
+            <a:endCxn id="106" idx="1"/>
+          </p:cNvCxnSpPr>
+          <p:nvPr/>
+        </p:nvCxnSpPr>
+        <p:spPr>
+          <a:xfrm flipV="1">
+            <a:off x="5913795" y="1901469"/>
+            <a:ext cx="431800" cy="108546"/>
+          </a:xfrm>
+          <a:prstGeom prst="curvedConnector3">
+            <a:avLst>
+              <a:gd name="adj1" fmla="val 50000"/>
+            </a:avLst>
+          </a:prstGeom>
+          <a:ln w="12700">
+            <a:solidFill>
+              <a:schemeClr val="accent2"/>
+            </a:solidFill>
+            <a:tailEnd type="triangle"/>
+          </a:ln>
+        </p:spPr>
+        <p:style>
+          <a:lnRef idx="2">
+            <a:schemeClr val="accent1"/>
+          </a:lnRef>
+          <a:fillRef idx="0">
+            <a:schemeClr val="accent1"/>
+          </a:fillRef>
+          <a:effectRef idx="1">
+            <a:schemeClr val="accent1"/>
+          </a:effectRef>
+          <a:fontRef idx="minor">
+            <a:schemeClr val="tx1"/>
+          </a:fontRef>
+        </p:style>
+      </p:cxnSp>
+      <p:cxnSp>
+        <p:nvCxnSpPr>
+          <p:cNvPr id="150" name="연결선: 구부러짐 149">
+            <a:extLst>
+              <a:ext uri="{FF2B5EF4-FFF2-40B4-BE49-F238E27FC236}">
+                <a16:creationId xmlns:a16="http://schemas.microsoft.com/office/drawing/2014/main" id="{18D78EA5-BE84-F83C-AB67-C00319919810}"/>
+              </a:ext>
+            </a:extLst>
+          </p:cNvPr>
+          <p:cNvCxnSpPr>
+            <a:cxnSpLocks/>
+            <a:stCxn id="19" idx="3"/>
+            <a:endCxn id="106" idx="1"/>
+          </p:cNvCxnSpPr>
+          <p:nvPr/>
+        </p:nvCxnSpPr>
+        <p:spPr>
+          <a:xfrm flipV="1">
+            <a:off x="5913795" y="1901469"/>
+            <a:ext cx="431800" cy="714594"/>
+          </a:xfrm>
+          <a:prstGeom prst="curvedConnector3">
+            <a:avLst>
+              <a:gd name="adj1" fmla="val 50000"/>
+            </a:avLst>
+          </a:prstGeom>
+          <a:ln w="12700">
+            <a:solidFill>
+              <a:schemeClr val="accent2"/>
+            </a:solidFill>
+            <a:tailEnd type="triangle"/>
+          </a:ln>
+        </p:spPr>
+        <p:style>
+          <a:lnRef idx="2">
+            <a:schemeClr val="accent1"/>
+          </a:lnRef>
+          <a:fillRef idx="0">
+            <a:schemeClr val="accent1"/>
+          </a:fillRef>
+          <a:effectRef idx="1">
+            <a:schemeClr val="accent1"/>
+          </a:effectRef>
+          <a:fontRef idx="minor">
+            <a:schemeClr val="tx1"/>
+          </a:fontRef>
+        </p:style>
+      </p:cxnSp>
+      <p:cxnSp>
+        <p:nvCxnSpPr>
+          <p:cNvPr id="153" name="연결선: 구부러짐 152">
+            <a:extLst>
+              <a:ext uri="{FF2B5EF4-FFF2-40B4-BE49-F238E27FC236}">
+                <a16:creationId xmlns:a16="http://schemas.microsoft.com/office/drawing/2014/main" id="{00935B1F-C609-1981-E7EC-D2CE5F742A5F}"/>
+              </a:ext>
+            </a:extLst>
+          </p:cNvPr>
+          <p:cNvCxnSpPr>
+            <a:cxnSpLocks/>
+            <a:stCxn id="20" idx="3"/>
+            <a:endCxn id="107" idx="1"/>
+          </p:cNvCxnSpPr>
+          <p:nvPr/>
+        </p:nvCxnSpPr>
+        <p:spPr>
+          <a:xfrm>
+            <a:off x="5913795" y="3222111"/>
+            <a:ext cx="431800" cy="457493"/>
+          </a:xfrm>
+          <a:prstGeom prst="curvedConnector3">
+            <a:avLst>
+              <a:gd name="adj1" fmla="val 50000"/>
+            </a:avLst>
+          </a:prstGeom>
+          <a:ln w="12700">
+            <a:solidFill>
+              <a:schemeClr val="accent2"/>
+            </a:solidFill>
+            <a:tailEnd type="triangle"/>
+          </a:ln>
+        </p:spPr>
+        <p:style>
+          <a:lnRef idx="2">
+            <a:schemeClr val="accent1"/>
+          </a:lnRef>
+          <a:fillRef idx="0">
+            <a:schemeClr val="accent1"/>
+          </a:fillRef>
+          <a:effectRef idx="1">
+            <a:schemeClr val="accent1"/>
+          </a:effectRef>
+          <a:fontRef idx="minor">
+            <a:schemeClr val="tx1"/>
+          </a:fontRef>
+        </p:style>
+      </p:cxnSp>
+      <p:cxnSp>
+        <p:nvCxnSpPr>
+          <p:cNvPr id="156" name="연결선: 구부러짐 155">
+            <a:extLst>
+              <a:ext uri="{FF2B5EF4-FFF2-40B4-BE49-F238E27FC236}">
+                <a16:creationId xmlns:a16="http://schemas.microsoft.com/office/drawing/2014/main" id="{4D0CD76A-F291-5B83-060A-144912361BD8}"/>
+              </a:ext>
+            </a:extLst>
+          </p:cNvPr>
+          <p:cNvCxnSpPr>
+            <a:cxnSpLocks/>
+            <a:stCxn id="21" idx="3"/>
+            <a:endCxn id="107" idx="1"/>
+          </p:cNvCxnSpPr>
+          <p:nvPr/>
+        </p:nvCxnSpPr>
+        <p:spPr>
+          <a:xfrm flipV="1">
+            <a:off x="5913795" y="3679604"/>
+            <a:ext cx="431800" cy="148555"/>
+          </a:xfrm>
+          <a:prstGeom prst="curvedConnector3">
+            <a:avLst>
+              <a:gd name="adj1" fmla="val 50000"/>
+            </a:avLst>
+          </a:prstGeom>
+          <a:ln w="12700">
+            <a:solidFill>
+              <a:schemeClr val="accent2"/>
+            </a:solidFill>
+            <a:tailEnd type="triangle"/>
+          </a:ln>
+        </p:spPr>
+        <p:style>
+          <a:lnRef idx="2">
+            <a:schemeClr val="accent1"/>
+          </a:lnRef>
+          <a:fillRef idx="0">
+            <a:schemeClr val="accent1"/>
+          </a:fillRef>
+          <a:effectRef idx="1">
+            <a:schemeClr val="accent1"/>
+          </a:effectRef>
+          <a:fontRef idx="minor">
+            <a:schemeClr val="tx1"/>
+          </a:fontRef>
+        </p:style>
+      </p:cxnSp>
+      <p:cxnSp>
+        <p:nvCxnSpPr>
+          <p:cNvPr id="159" name="연결선: 구부러짐 158">
+            <a:extLst>
+              <a:ext uri="{FF2B5EF4-FFF2-40B4-BE49-F238E27FC236}">
+                <a16:creationId xmlns:a16="http://schemas.microsoft.com/office/drawing/2014/main" id="{9CA3E757-903B-09CC-C005-09E6F55982C6}"/>
+              </a:ext>
+            </a:extLst>
+          </p:cNvPr>
+          <p:cNvCxnSpPr>
+            <a:cxnSpLocks/>
+            <a:stCxn id="22" idx="3"/>
+            <a:endCxn id="107" idx="1"/>
+          </p:cNvCxnSpPr>
+          <p:nvPr/>
+        </p:nvCxnSpPr>
+        <p:spPr>
+          <a:xfrm flipV="1">
+            <a:off x="5913795" y="3679604"/>
+            <a:ext cx="431800" cy="754603"/>
+          </a:xfrm>
+          <a:prstGeom prst="curvedConnector3">
+            <a:avLst>
+              <a:gd name="adj1" fmla="val 50000"/>
+            </a:avLst>
+          </a:prstGeom>
+          <a:ln w="12700">
+            <a:solidFill>
+              <a:schemeClr val="accent2"/>
+            </a:solidFill>
+            <a:tailEnd type="triangle"/>
+          </a:ln>
+        </p:spPr>
+        <p:style>
+          <a:lnRef idx="2">
+            <a:schemeClr val="accent1"/>
+          </a:lnRef>
+          <a:fillRef idx="0">
+            <a:schemeClr val="accent1"/>
+          </a:fillRef>
+          <a:effectRef idx="1">
+            <a:schemeClr val="accent1"/>
+          </a:effectRef>
+          <a:fontRef idx="minor">
+            <a:schemeClr val="tx1"/>
+          </a:fontRef>
+        </p:style>
+      </p:cxnSp>
+      <p:cxnSp>
+        <p:nvCxnSpPr>
+          <p:cNvPr id="162" name="연결선: 구부러짐 161">
+            <a:extLst>
+              <a:ext uri="{FF2B5EF4-FFF2-40B4-BE49-F238E27FC236}">
+                <a16:creationId xmlns:a16="http://schemas.microsoft.com/office/drawing/2014/main" id="{3B99022F-1C00-E862-3FA2-BCC97CD4B414}"/>
+              </a:ext>
+            </a:extLst>
+          </p:cNvPr>
+          <p:cNvCxnSpPr>
+            <a:cxnSpLocks/>
+            <a:stCxn id="23" idx="3"/>
+            <a:endCxn id="108" idx="1"/>
+          </p:cNvCxnSpPr>
+          <p:nvPr/>
+        </p:nvCxnSpPr>
+        <p:spPr>
+          <a:xfrm>
+            <a:off x="5913795" y="5040255"/>
+            <a:ext cx="431800" cy="417484"/>
+          </a:xfrm>
+          <a:prstGeom prst="curvedConnector3">
+            <a:avLst>
+              <a:gd name="adj1" fmla="val 50000"/>
+            </a:avLst>
+          </a:prstGeom>
+          <a:ln w="12700">
+            <a:solidFill>
+              <a:schemeClr val="accent2"/>
+            </a:solidFill>
+            <a:tailEnd type="triangle"/>
+          </a:ln>
+        </p:spPr>
+        <p:style>
+          <a:lnRef idx="2">
+            <a:schemeClr val="accent1"/>
+          </a:lnRef>
+          <a:fillRef idx="0">
+            <a:schemeClr val="accent1"/>
+          </a:fillRef>
+          <a:effectRef idx="1">
+            <a:schemeClr val="accent1"/>
+          </a:effectRef>
+          <a:fontRef idx="minor">
+            <a:schemeClr val="tx1"/>
+          </a:fontRef>
+        </p:style>
+      </p:cxnSp>
+      <p:cxnSp>
+        <p:nvCxnSpPr>
+          <p:cNvPr id="165" name="연결선: 구부러짐 164">
+            <a:extLst>
+              <a:ext uri="{FF2B5EF4-FFF2-40B4-BE49-F238E27FC236}">
+                <a16:creationId xmlns:a16="http://schemas.microsoft.com/office/drawing/2014/main" id="{04A0FE01-F870-5AE2-0BFE-CC71730701C5}"/>
+              </a:ext>
+            </a:extLst>
+          </p:cNvPr>
+          <p:cNvCxnSpPr>
+            <a:cxnSpLocks/>
+            <a:stCxn id="24" idx="3"/>
+            <a:endCxn id="108" idx="1"/>
+          </p:cNvCxnSpPr>
+          <p:nvPr/>
+        </p:nvCxnSpPr>
+        <p:spPr>
+          <a:xfrm flipV="1">
+            <a:off x="5913795" y="5457739"/>
+            <a:ext cx="431800" cy="188564"/>
+          </a:xfrm>
+          <a:prstGeom prst="curvedConnector3">
+            <a:avLst>
+              <a:gd name="adj1" fmla="val 50000"/>
+            </a:avLst>
+          </a:prstGeom>
+          <a:ln w="12700">
+            <a:solidFill>
+              <a:schemeClr val="accent2"/>
+            </a:solidFill>
+            <a:tailEnd type="triangle"/>
+          </a:ln>
+        </p:spPr>
+        <p:style>
+          <a:lnRef idx="2">
+            <a:schemeClr val="accent1"/>
+          </a:lnRef>
+          <a:fillRef idx="0">
+            <a:schemeClr val="accent1"/>
+          </a:fillRef>
+          <a:effectRef idx="1">
+            <a:schemeClr val="accent1"/>
+          </a:effectRef>
+          <a:fontRef idx="minor">
+            <a:schemeClr val="tx1"/>
+          </a:fontRef>
+        </p:style>
+      </p:cxnSp>
+      <p:cxnSp>
+        <p:nvCxnSpPr>
+          <p:cNvPr id="168" name="연결선: 구부러짐 167">
+            <a:extLst>
+              <a:ext uri="{FF2B5EF4-FFF2-40B4-BE49-F238E27FC236}">
+                <a16:creationId xmlns:a16="http://schemas.microsoft.com/office/drawing/2014/main" id="{B5AFF019-8B02-6E49-6214-F5847CCDE0E2}"/>
+              </a:ext>
+            </a:extLst>
+          </p:cNvPr>
+          <p:cNvCxnSpPr>
+            <a:cxnSpLocks/>
+            <a:stCxn id="25" idx="3"/>
+            <a:endCxn id="108" idx="1"/>
+          </p:cNvCxnSpPr>
+          <p:nvPr/>
+        </p:nvCxnSpPr>
+        <p:spPr>
+          <a:xfrm flipV="1">
+            <a:off x="5913795" y="5457739"/>
+            <a:ext cx="431800" cy="794620"/>
+          </a:xfrm>
+          <a:prstGeom prst="curvedConnector3">
+            <a:avLst>
+              <a:gd name="adj1" fmla="val 50000"/>
+            </a:avLst>
+          </a:prstGeom>
+          <a:ln w="12700">
+            <a:solidFill>
+              <a:schemeClr val="accent2"/>
+            </a:solidFill>
+            <a:tailEnd type="triangle"/>
+          </a:ln>
+        </p:spPr>
+        <p:style>
+          <a:lnRef idx="2">
+            <a:schemeClr val="accent1"/>
+          </a:lnRef>
+          <a:fillRef idx="0">
+            <a:schemeClr val="accent1"/>
+          </a:fillRef>
+          <a:effectRef idx="1">
+            <a:schemeClr val="accent1"/>
+          </a:effectRef>
+          <a:fontRef idx="minor">
+            <a:schemeClr val="tx1"/>
+          </a:fontRef>
+        </p:style>
+      </p:cxnSp>
+      <p:cxnSp>
+        <p:nvCxnSpPr>
+          <p:cNvPr id="185" name="직선 화살표 연결선 184">
+            <a:extLst>
+              <a:ext uri="{FF2B5EF4-FFF2-40B4-BE49-F238E27FC236}">
+                <a16:creationId xmlns:a16="http://schemas.microsoft.com/office/drawing/2014/main" id="{B21DC92E-8509-CC53-F8D9-CDFFEA8E6122}"/>
+              </a:ext>
+            </a:extLst>
+          </p:cNvPr>
+          <p:cNvCxnSpPr>
+            <a:cxnSpLocks/>
+            <a:stCxn id="106" idx="3"/>
+          </p:cNvCxnSpPr>
+          <p:nvPr/>
+        </p:nvCxnSpPr>
+        <p:spPr>
+          <a:xfrm>
+            <a:off x="6866295" y="1901469"/>
+            <a:ext cx="689967" cy="1063540"/>
+          </a:xfrm>
+          <a:prstGeom prst="straightConnector1">
+            <a:avLst/>
+          </a:prstGeom>
+          <a:ln w="19050">
+            <a:solidFill>
+              <a:schemeClr val="tx1"/>
+            </a:solidFill>
+            <a:tailEnd type="triangle"/>
+          </a:ln>
+        </p:spPr>
+        <p:style>
+          <a:lnRef idx="2">
+            <a:schemeClr val="accent1"/>
+          </a:lnRef>
+          <a:fillRef idx="0">
+            <a:schemeClr val="accent1"/>
+          </a:fillRef>
+          <a:effectRef idx="1">
+            <a:schemeClr val="accent1"/>
+          </a:effectRef>
+          <a:fontRef idx="minor">
+            <a:schemeClr val="tx1"/>
+          </a:fontRef>
+        </p:style>
+      </p:cxnSp>
+      <p:cxnSp>
+        <p:nvCxnSpPr>
+          <p:cNvPr id="194" name="직선 화살표 연결선 193">
+            <a:extLst>
+              <a:ext uri="{FF2B5EF4-FFF2-40B4-BE49-F238E27FC236}">
+                <a16:creationId xmlns:a16="http://schemas.microsoft.com/office/drawing/2014/main" id="{6F76C57E-665D-2B6D-4E53-6E00AE329043}"/>
+              </a:ext>
+            </a:extLst>
+          </p:cNvPr>
+          <p:cNvCxnSpPr>
+            <a:cxnSpLocks/>
+            <a:stCxn id="107" idx="3"/>
+          </p:cNvCxnSpPr>
+          <p:nvPr/>
+        </p:nvCxnSpPr>
+        <p:spPr>
+          <a:xfrm>
+            <a:off x="6866295" y="3679604"/>
+            <a:ext cx="663141" cy="10459"/>
+          </a:xfrm>
+          <a:prstGeom prst="straightConnector1">
+            <a:avLst/>
+          </a:prstGeom>
+          <a:ln w="19050">
+            <a:solidFill>
+              <a:schemeClr val="tx1"/>
+            </a:solidFill>
+            <a:tailEnd type="triangle"/>
+          </a:ln>
+        </p:spPr>
+        <p:style>
+          <a:lnRef idx="2">
+            <a:schemeClr val="accent1"/>
+          </a:lnRef>
+          <a:fillRef idx="0">
+            <a:schemeClr val="accent1"/>
+          </a:fillRef>
+          <a:effectRef idx="1">
+            <a:schemeClr val="accent1"/>
+          </a:effectRef>
+          <a:fontRef idx="minor">
+            <a:schemeClr val="tx1"/>
+          </a:fontRef>
+        </p:style>
+      </p:cxnSp>
+      <p:cxnSp>
+        <p:nvCxnSpPr>
+          <p:cNvPr id="203" name="직선 화살표 연결선 202">
+            <a:extLst>
+              <a:ext uri="{FF2B5EF4-FFF2-40B4-BE49-F238E27FC236}">
+                <a16:creationId xmlns:a16="http://schemas.microsoft.com/office/drawing/2014/main" id="{88716F1A-2956-E361-73C9-F4DA8D385F93}"/>
+              </a:ext>
+            </a:extLst>
+          </p:cNvPr>
+          <p:cNvCxnSpPr>
+            <a:cxnSpLocks/>
+            <a:stCxn id="108" idx="3"/>
+          </p:cNvCxnSpPr>
+          <p:nvPr/>
+        </p:nvCxnSpPr>
+        <p:spPr>
+          <a:xfrm flipV="1">
+            <a:off x="6866295" y="4306413"/>
+            <a:ext cx="689967" cy="1151326"/>
+          </a:xfrm>
+          <a:prstGeom prst="straightConnector1">
+            <a:avLst/>
+          </a:prstGeom>
+          <a:ln w="19050">
+            <a:solidFill>
+              <a:schemeClr val="tx1"/>
+            </a:solidFill>
+            <a:tailEnd type="triangle"/>
+          </a:ln>
+        </p:spPr>
+        <p:style>
+          <a:lnRef idx="2">
+            <a:schemeClr val="accent1"/>
+          </a:lnRef>
+          <a:fillRef idx="0">
+            <a:schemeClr val="accent1"/>
+          </a:fillRef>
+          <a:effectRef idx="1">
+            <a:schemeClr val="accent1"/>
+          </a:effectRef>
+          <a:fontRef idx="minor">
+            <a:schemeClr val="tx1"/>
+          </a:fontRef>
+        </p:style>
+      </p:cxnSp>
+      <p:sp>
+        <p:nvSpPr>
+          <p:cNvPr id="209" name="사다리꼴 208">
+            <a:extLst>
+              <a:ext uri="{FF2B5EF4-FFF2-40B4-BE49-F238E27FC236}">
+                <a16:creationId xmlns:a16="http://schemas.microsoft.com/office/drawing/2014/main" id="{BFDCF1BB-5933-95BB-B942-F7EE1FF6B817}"/>
+              </a:ext>
+            </a:extLst>
+          </p:cNvPr>
+          <p:cNvSpPr/>
+          <p:nvPr/>
+        </p:nvSpPr>
+        <p:spPr>
+          <a:xfrm rot="5400000">
+            <a:off x="6397750" y="3260614"/>
+            <a:ext cx="2867813" cy="594517"/>
+          </a:xfrm>
+          <a:prstGeom prst="trapezoid">
+            <a:avLst>
+              <a:gd name="adj" fmla="val 65588"/>
+            </a:avLst>
+          </a:prstGeom>
+          <a:solidFill>
+            <a:schemeClr val="tx2">
+              <a:lumMod val="10000"/>
+              <a:lumOff val="90000"/>
+            </a:schemeClr>
+          </a:solidFill>
+          <a:ln w="12700"/>
+        </p:spPr>
+        <p:style>
+          <a:lnRef idx="2">
+            <a:schemeClr val="accent1">
+              <a:shade val="15000"/>
+            </a:schemeClr>
+          </a:lnRef>
+          <a:fillRef idx="1">
+            <a:schemeClr val="accent1"/>
+          </a:fillRef>
+          <a:effectRef idx="0">
+            <a:schemeClr val="accent1"/>
+          </a:effectRef>
+          <a:fontRef idx="minor">
+            <a:schemeClr val="lt1"/>
+          </a:fontRef>
+        </p:style>
+        <p:txBody>
+          <a:bodyPr vert="vert270" rtlCol="0" anchor="ctr"/>
+          <a:lstStyle/>
+          <a:p>
+            <a:pPr algn="ctr"/>
+            <a:r>
+              <a:rPr lang="en-US" altLang="ko-KR" sz="1400" dirty="0">
+                <a:solidFill>
+                  <a:schemeClr val="tx1"/>
+                </a:solidFill>
+              </a:rPr>
+              <a:t>ACC</a:t>
+            </a:r>
+            <a:endParaRPr lang="ko-KR" altLang="en-US" sz="1400" dirty="0">
+              <a:solidFill>
+                <a:schemeClr val="tx1"/>
+              </a:solidFill>
+            </a:endParaRPr>
+          </a:p>
+        </p:txBody>
+      </p:sp>
+      <p:sp>
+        <p:nvSpPr>
+          <p:cNvPr id="276" name="직사각형 275">
+            <a:extLst>
+              <a:ext uri="{FF2B5EF4-FFF2-40B4-BE49-F238E27FC236}">
+                <a16:creationId xmlns:a16="http://schemas.microsoft.com/office/drawing/2014/main" id="{4DE2BF74-DDAA-092C-110C-E3BB9000B5B4}"/>
+              </a:ext>
+            </a:extLst>
+          </p:cNvPr>
+          <p:cNvSpPr/>
+          <p:nvPr/>
+        </p:nvSpPr>
+        <p:spPr>
+          <a:xfrm>
+            <a:off x="8447010" y="3430079"/>
+            <a:ext cx="431800" cy="255587"/>
+          </a:xfrm>
+          <a:prstGeom prst="rect">
+            <a:avLst/>
+          </a:prstGeom>
+          <a:solidFill>
+            <a:schemeClr val="tx2">
+              <a:lumMod val="10000"/>
+              <a:lumOff val="90000"/>
+            </a:schemeClr>
+          </a:solidFill>
+          <a:ln w="12700"/>
+        </p:spPr>
+        <p:style>
+          <a:lnRef idx="2">
+            <a:schemeClr val="accent1">
+              <a:shade val="15000"/>
+            </a:schemeClr>
+          </a:lnRef>
+          <a:fillRef idx="1">
+            <a:schemeClr val="accent1"/>
+          </a:fillRef>
+          <a:effectRef idx="0">
+            <a:schemeClr val="accent1"/>
+          </a:effectRef>
+          <a:fontRef idx="minor">
+            <a:schemeClr val="lt1"/>
+          </a:fontRef>
+        </p:style>
+        <p:txBody>
+          <a:bodyPr rtlCol="0" anchor="ctr"/>
+          <a:lstStyle/>
+          <a:p>
+            <a:pPr algn="ctr"/>
+            <a:r>
+              <a:rPr lang="en-US" altLang="ko-KR" sz="1100" dirty="0">
+                <a:solidFill>
+                  <a:sysClr val="windowText" lastClr="000000"/>
+                </a:solidFill>
+              </a:rPr>
+              <a:t>DFF</a:t>
+            </a:r>
+            <a:endParaRPr lang="ko-KR" altLang="en-US" sz="1100" dirty="0">
+              <a:solidFill>
+                <a:sysClr val="windowText" lastClr="000000"/>
+              </a:solidFill>
+            </a:endParaRPr>
+          </a:p>
+        </p:txBody>
+      </p:sp>
+      <p:cxnSp>
+        <p:nvCxnSpPr>
+          <p:cNvPr id="277" name="직선 화살표 연결선 276">
+            <a:extLst>
+              <a:ext uri="{FF2B5EF4-FFF2-40B4-BE49-F238E27FC236}">
+                <a16:creationId xmlns:a16="http://schemas.microsoft.com/office/drawing/2014/main" id="{C4C2F975-90FE-23AB-92CF-3F9CEDA6F2E5}"/>
+              </a:ext>
+            </a:extLst>
+          </p:cNvPr>
+          <p:cNvCxnSpPr>
+            <a:cxnSpLocks/>
+          </p:cNvCxnSpPr>
+          <p:nvPr/>
+        </p:nvCxnSpPr>
+        <p:spPr>
+          <a:xfrm>
+            <a:off x="8128915" y="3565492"/>
+            <a:ext cx="318095" cy="0"/>
+          </a:xfrm>
+          <a:prstGeom prst="straightConnector1">
+            <a:avLst/>
+          </a:prstGeom>
+          <a:ln w="12700">
+            <a:solidFill>
+              <a:schemeClr val="tx1"/>
+            </a:solidFill>
+            <a:tailEnd type="triangle"/>
+          </a:ln>
+        </p:spPr>
+        <p:style>
+          <a:lnRef idx="2">
+            <a:schemeClr val="accent1"/>
+          </a:lnRef>
+          <a:fillRef idx="0">
+            <a:schemeClr val="accent1"/>
+          </a:fillRef>
+          <a:effectRef idx="1">
+            <a:schemeClr val="accent1"/>
+          </a:effectRef>
+          <a:fontRef idx="minor">
+            <a:schemeClr val="tx1"/>
+          </a:fontRef>
+        </p:style>
+      </p:cxnSp>
+      <p:sp>
+        <p:nvSpPr>
+          <p:cNvPr id="280" name="직사각형 279">
+            <a:extLst>
+              <a:ext uri="{FF2B5EF4-FFF2-40B4-BE49-F238E27FC236}">
+                <a16:creationId xmlns:a16="http://schemas.microsoft.com/office/drawing/2014/main" id="{268ED194-B6A6-1B66-8B9B-5EAB17E14C29}"/>
+              </a:ext>
+            </a:extLst>
+          </p:cNvPr>
+          <p:cNvSpPr/>
+          <p:nvPr/>
+        </p:nvSpPr>
+        <p:spPr>
+          <a:xfrm>
+            <a:off x="9196906" y="3430079"/>
+            <a:ext cx="819150" cy="255587"/>
+          </a:xfrm>
+          <a:prstGeom prst="rect">
+            <a:avLst/>
+          </a:prstGeom>
+          <a:solidFill>
+            <a:schemeClr val="tx2">
+              <a:lumMod val="10000"/>
+              <a:lumOff val="90000"/>
+            </a:schemeClr>
+          </a:solidFill>
+          <a:ln w="12700"/>
+        </p:spPr>
+        <p:style>
+          <a:lnRef idx="2">
+            <a:schemeClr val="accent1">
+              <a:shade val="15000"/>
+            </a:schemeClr>
+          </a:lnRef>
+          <a:fillRef idx="1">
+            <a:schemeClr val="accent1"/>
+          </a:fillRef>
+          <a:effectRef idx="0">
+            <a:schemeClr val="accent1"/>
+          </a:effectRef>
+          <a:fontRef idx="minor">
+            <a:schemeClr val="lt1"/>
+          </a:fontRef>
+        </p:style>
+        <p:txBody>
+          <a:bodyPr rtlCol="0" anchor="ctr"/>
+          <a:lstStyle/>
+          <a:p>
+            <a:pPr algn="ctr"/>
+            <a:r>
+              <a:rPr lang="en-US" altLang="ko-KR" sz="1100" dirty="0">
+                <a:solidFill>
+                  <a:sysClr val="windowText" lastClr="000000"/>
+                </a:solidFill>
+              </a:rPr>
+              <a:t>Formatter</a:t>
+            </a:r>
+            <a:endParaRPr lang="ko-KR" altLang="en-US" sz="1100" dirty="0">
+              <a:solidFill>
+                <a:sysClr val="windowText" lastClr="000000"/>
+              </a:solidFill>
+            </a:endParaRPr>
+          </a:p>
+        </p:txBody>
+      </p:sp>
+      <p:cxnSp>
+        <p:nvCxnSpPr>
+          <p:cNvPr id="281" name="직선 화살표 연결선 280">
+            <a:extLst>
+              <a:ext uri="{FF2B5EF4-FFF2-40B4-BE49-F238E27FC236}">
+                <a16:creationId xmlns:a16="http://schemas.microsoft.com/office/drawing/2014/main" id="{11AA1CA0-6488-301C-4529-CFB698EF7072}"/>
+              </a:ext>
+            </a:extLst>
+          </p:cNvPr>
+          <p:cNvCxnSpPr>
+            <a:cxnSpLocks/>
+          </p:cNvCxnSpPr>
+          <p:nvPr/>
+        </p:nvCxnSpPr>
+        <p:spPr>
+          <a:xfrm>
+            <a:off x="8878810" y="3564858"/>
+            <a:ext cx="318096" cy="0"/>
+          </a:xfrm>
+          <a:prstGeom prst="straightConnector1">
+            <a:avLst/>
+          </a:prstGeom>
+          <a:ln w="12700">
+            <a:solidFill>
+              <a:schemeClr val="tx1"/>
+            </a:solidFill>
+            <a:tailEnd type="triangle"/>
+          </a:ln>
+        </p:spPr>
+        <p:style>
+          <a:lnRef idx="2">
+            <a:schemeClr val="accent1"/>
+          </a:lnRef>
+          <a:fillRef idx="0">
+            <a:schemeClr val="accent1"/>
+          </a:fillRef>
+          <a:effectRef idx="1">
+            <a:schemeClr val="accent1"/>
+          </a:effectRef>
+          <a:fontRef idx="minor">
+            <a:schemeClr val="tx1"/>
+          </a:fontRef>
+        </p:style>
+      </p:cxnSp>
+      <p:sp>
+        <p:nvSpPr>
+          <p:cNvPr id="26" name="직사각형 25">
+            <a:extLst>
+              <a:ext uri="{FF2B5EF4-FFF2-40B4-BE49-F238E27FC236}">
+                <a16:creationId xmlns:a16="http://schemas.microsoft.com/office/drawing/2014/main" id="{B49692A7-D1FB-C76D-D747-18B016D74CE5}"/>
+              </a:ext>
+            </a:extLst>
+          </p:cNvPr>
+          <p:cNvSpPr/>
+          <p:nvPr/>
+        </p:nvSpPr>
+        <p:spPr>
+          <a:xfrm>
+            <a:off x="10203182" y="2097372"/>
+            <a:ext cx="565150" cy="2921000"/>
+          </a:xfrm>
+          <a:prstGeom prst="rect">
+            <a:avLst/>
+          </a:prstGeom>
+          <a:solidFill>
+            <a:schemeClr val="tx2">
+              <a:lumMod val="10000"/>
+              <a:lumOff val="90000"/>
+            </a:schemeClr>
+          </a:solidFill>
+          <a:ln w="12700"/>
+        </p:spPr>
+        <p:style>
+          <a:lnRef idx="2">
+            <a:schemeClr val="accent1">
+              <a:shade val="15000"/>
+            </a:schemeClr>
+          </a:lnRef>
+          <a:fillRef idx="1">
+            <a:schemeClr val="accent1"/>
+          </a:fillRef>
+          <a:effectRef idx="0">
+            <a:schemeClr val="accent1"/>
+          </a:effectRef>
+          <a:fontRef idx="minor">
+            <a:schemeClr val="lt1"/>
+          </a:fontRef>
+        </p:style>
+        <p:txBody>
+          <a:bodyPr rtlCol="0" anchor="ctr"/>
+          <a:lstStyle/>
+          <a:p>
+            <a:pPr algn="ctr"/>
+            <a:r>
+              <a:rPr lang="en-US" altLang="ko-KR" sz="1600" dirty="0">
+                <a:solidFill>
+                  <a:sysClr val="windowText" lastClr="000000"/>
+                </a:solidFill>
+              </a:rPr>
+              <a:t>SPI</a:t>
+            </a:r>
+            <a:endParaRPr lang="ko-KR" altLang="en-US" sz="1600" dirty="0">
+              <a:solidFill>
+                <a:sysClr val="windowText" lastClr="000000"/>
+              </a:solidFill>
+            </a:endParaRPr>
+          </a:p>
+        </p:txBody>
+      </p:sp>
+      <p:cxnSp>
+        <p:nvCxnSpPr>
+          <p:cNvPr id="27" name="직선 화살표 연결선 26">
+            <a:extLst>
+              <a:ext uri="{FF2B5EF4-FFF2-40B4-BE49-F238E27FC236}">
+                <a16:creationId xmlns:a16="http://schemas.microsoft.com/office/drawing/2014/main" id="{D609E196-7183-3B83-41F0-A786D662782E}"/>
+              </a:ext>
+            </a:extLst>
+          </p:cNvPr>
+          <p:cNvCxnSpPr>
+            <a:cxnSpLocks/>
+          </p:cNvCxnSpPr>
+          <p:nvPr/>
+        </p:nvCxnSpPr>
+        <p:spPr>
+          <a:xfrm flipV="1">
+            <a:off x="10016056" y="3565492"/>
+            <a:ext cx="187126" cy="1"/>
+          </a:xfrm>
+          <a:prstGeom prst="straightConnector1">
+            <a:avLst/>
+          </a:prstGeom>
+          <a:ln w="12700">
+            <a:solidFill>
+              <a:schemeClr val="tx1"/>
+            </a:solidFill>
+            <a:tailEnd type="triangle"/>
+          </a:ln>
+        </p:spPr>
+        <p:style>
+          <a:lnRef idx="2">
+            <a:schemeClr val="accent1"/>
+          </a:lnRef>
+          <a:fillRef idx="0">
+            <a:schemeClr val="accent1"/>
+          </a:fillRef>
+          <a:effectRef idx="1">
+            <a:schemeClr val="accent1"/>
+          </a:effectRef>
+          <a:fontRef idx="minor">
+            <a:schemeClr val="tx1"/>
+          </a:fontRef>
+        </p:style>
+      </p:cxnSp>
+      <p:sp>
+        <p:nvSpPr>
+          <p:cNvPr id="28" name="TextBox 27">
+            <a:extLst>
+              <a:ext uri="{FF2B5EF4-FFF2-40B4-BE49-F238E27FC236}">
+                <a16:creationId xmlns:a16="http://schemas.microsoft.com/office/drawing/2014/main" id="{3490FDBC-0074-94A8-FACB-71097A3EDDA9}"/>
+              </a:ext>
+            </a:extLst>
+          </p:cNvPr>
+          <p:cNvSpPr txBox="1"/>
+          <p:nvPr/>
+        </p:nvSpPr>
+        <p:spPr>
+          <a:xfrm>
+            <a:off x="5551507" y="962435"/>
+            <a:ext cx="706716" cy="276999"/>
+          </a:xfrm>
+          <a:prstGeom prst="rect">
+            <a:avLst/>
+          </a:prstGeom>
+          <a:noFill/>
+        </p:spPr>
+        <p:txBody>
+          <a:bodyPr wrap="square" rtlCol="0">
+            <a:spAutoFit/>
+          </a:bodyPr>
+          <a:lstStyle/>
+          <a:p>
+            <a:pPr algn="ctr"/>
+            <a:r>
+              <a:rPr lang="en-US" altLang="ko-KR" sz="1200" dirty="0"/>
+              <a:t>weight</a:t>
+            </a:r>
+            <a:endParaRPr lang="ko-KR" altLang="en-US" sz="1200" dirty="0"/>
+          </a:p>
+        </p:txBody>
+      </p:sp>
+      <p:sp>
+        <p:nvSpPr>
+          <p:cNvPr id="30" name="TextBox 29">
+            <a:extLst>
+              <a:ext uri="{FF2B5EF4-FFF2-40B4-BE49-F238E27FC236}">
+                <a16:creationId xmlns:a16="http://schemas.microsoft.com/office/drawing/2014/main" id="{B829A5A5-F665-A363-3319-D805BA8E253A}"/>
+              </a:ext>
+            </a:extLst>
+          </p:cNvPr>
+          <p:cNvSpPr txBox="1"/>
+          <p:nvPr/>
+        </p:nvSpPr>
+        <p:spPr>
+          <a:xfrm>
+            <a:off x="4686379" y="659410"/>
+            <a:ext cx="706716" cy="276999"/>
+          </a:xfrm>
+          <a:prstGeom prst="rect">
+            <a:avLst/>
+          </a:prstGeom>
+          <a:noFill/>
+        </p:spPr>
+        <p:txBody>
+          <a:bodyPr wrap="square" rtlCol="0">
+            <a:spAutoFit/>
+          </a:bodyPr>
+          <a:lstStyle/>
+          <a:p>
+            <a:pPr algn="ctr"/>
+            <a:r>
+              <a:rPr lang="en-US" altLang="ko-KR" sz="1200" dirty="0"/>
+              <a:t>input</a:t>
+            </a:r>
+            <a:endParaRPr lang="ko-KR" altLang="en-US" sz="1200" dirty="0"/>
+          </a:p>
+        </p:txBody>
+      </p:sp>
+      <p:sp>
+        <p:nvSpPr>
+          <p:cNvPr id="33" name="직사각형 32">
+            <a:extLst>
+              <a:ext uri="{FF2B5EF4-FFF2-40B4-BE49-F238E27FC236}">
+                <a16:creationId xmlns:a16="http://schemas.microsoft.com/office/drawing/2014/main" id="{37D1EEAA-B3D9-7A30-EA69-3A10463CD9F0}"/>
+              </a:ext>
+            </a:extLst>
+          </p:cNvPr>
+          <p:cNvSpPr/>
+          <p:nvPr/>
+        </p:nvSpPr>
+        <p:spPr>
+          <a:xfrm>
+            <a:off x="2585718" y="3426860"/>
+            <a:ext cx="819150" cy="255587"/>
+          </a:xfrm>
+          <a:prstGeom prst="rect">
+            <a:avLst/>
+          </a:prstGeom>
+          <a:solidFill>
+            <a:schemeClr val="tx2">
+              <a:lumMod val="10000"/>
+              <a:lumOff val="90000"/>
+            </a:schemeClr>
+          </a:solidFill>
+          <a:ln w="12700"/>
+        </p:spPr>
+        <p:style>
+          <a:lnRef idx="2">
+            <a:schemeClr val="accent1">
+              <a:shade val="15000"/>
+            </a:schemeClr>
+          </a:lnRef>
+          <a:fillRef idx="1">
+            <a:schemeClr val="accent1"/>
+          </a:fillRef>
+          <a:effectRef idx="0">
+            <a:schemeClr val="accent1"/>
+          </a:effectRef>
+          <a:fontRef idx="minor">
+            <a:schemeClr val="lt1"/>
+          </a:fontRef>
+        </p:style>
+        <p:txBody>
+          <a:bodyPr rtlCol="0" anchor="ctr"/>
+          <a:lstStyle/>
+          <a:p>
+            <a:pPr algn="ctr"/>
+            <a:r>
+              <a:rPr lang="en-US" altLang="ko-KR" sz="1100" dirty="0">
+                <a:solidFill>
+                  <a:sysClr val="windowText" lastClr="000000"/>
+                </a:solidFill>
+              </a:rPr>
+              <a:t>Formatter</a:t>
+            </a:r>
+            <a:endParaRPr lang="ko-KR" altLang="en-US" sz="1100" dirty="0">
+              <a:solidFill>
+                <a:sysClr val="windowText" lastClr="000000"/>
+              </a:solidFill>
+            </a:endParaRPr>
+          </a:p>
+        </p:txBody>
+      </p:sp>
+      <p:cxnSp>
+        <p:nvCxnSpPr>
+          <p:cNvPr id="59" name="직선 화살표 연결선 58">
+            <a:extLst>
+              <a:ext uri="{FF2B5EF4-FFF2-40B4-BE49-F238E27FC236}">
+                <a16:creationId xmlns:a16="http://schemas.microsoft.com/office/drawing/2014/main" id="{CE228607-DFBD-05AC-E2F1-C1E59304C936}"/>
+              </a:ext>
+            </a:extLst>
+          </p:cNvPr>
+          <p:cNvCxnSpPr>
+            <a:cxnSpLocks/>
+            <a:stCxn id="33" idx="3"/>
+            <a:endCxn id="5" idx="1"/>
+          </p:cNvCxnSpPr>
+          <p:nvPr/>
+        </p:nvCxnSpPr>
+        <p:spPr>
+          <a:xfrm>
+            <a:off x="3404868" y="3554654"/>
+            <a:ext cx="152402" cy="2140"/>
+          </a:xfrm>
+          <a:prstGeom prst="straightConnector1">
+            <a:avLst/>
+          </a:prstGeom>
+          <a:ln w="12700">
+            <a:solidFill>
+              <a:schemeClr val="tx1"/>
+            </a:solidFill>
+            <a:tailEnd type="triangle"/>
+          </a:ln>
+        </p:spPr>
+        <p:style>
+          <a:lnRef idx="2">
+            <a:schemeClr val="accent1"/>
+          </a:lnRef>
+          <a:fillRef idx="0">
+            <a:schemeClr val="accent1"/>
+          </a:fillRef>
+          <a:effectRef idx="1">
+            <a:schemeClr val="accent1"/>
+          </a:effectRef>
+          <a:fontRef idx="minor">
+            <a:schemeClr val="tx1"/>
+          </a:fontRef>
+        </p:style>
+      </p:cxnSp>
+    </p:spTree>
+    <p:extLst>
+      <p:ext uri="{BB962C8B-B14F-4D97-AF65-F5344CB8AC3E}">
+        <p14:creationId xmlns:p14="http://schemas.microsoft.com/office/powerpoint/2010/main" val="289352522"/>
+      </p:ext>
+    </p:extLst>
+  </p:cSld>
+  <p:clrMapOvr>
+    <a:masterClrMapping/>
+  </p:clrMapOvr>
+</p:sld>
+</file>
+
+<file path=ppt/slides/slide3.xml><?xml version="1.0" encoding="utf-8"?>
+<p:sld xmlns:a="http://schemas.openxmlformats.org/drawingml/2006/main" xmlns:r="http://schemas.openxmlformats.org/officeDocument/2006/relationships" xmlns:p="http://schemas.openxmlformats.org/presentationml/2006/main">
+  <p:cSld>
+    <p:spTree>
+      <p:nvGrpSpPr>
+        <p:cNvPr id="1" name="">
+          <a:extLst>
+            <a:ext uri="{FF2B5EF4-FFF2-40B4-BE49-F238E27FC236}">
               <a16:creationId xmlns:a16="http://schemas.microsoft.com/office/drawing/2014/main" id="{BC34EB64-1D89-A5BC-5BEF-8BDFDE473664}"/>
             </a:ext>
           </a:extLst>
@@ -15852,7 +20127,7 @@
 </p:sld>
 </file>
 
-<file path=ppt/slides/slide3.xml><?xml version="1.0" encoding="utf-8"?>
+<file path=ppt/slides/slide4.xml><?xml version="1.0" encoding="utf-8"?>
 <p:sld xmlns:a="http://schemas.openxmlformats.org/drawingml/2006/main" xmlns:r="http://schemas.openxmlformats.org/officeDocument/2006/relationships" xmlns:p="http://schemas.openxmlformats.org/presentationml/2006/main">
   <p:cSld>
     <p:spTree>
@@ -16131,10 +20406,10 @@
       </p:sp>
       <p:sp>
         <p:nvSpPr>
-          <p:cNvPr id="7" name="직사각형 6">
-            <a:extLst>
-              <a:ext uri="{FF2B5EF4-FFF2-40B4-BE49-F238E27FC236}">
-                <a16:creationId xmlns:a16="http://schemas.microsoft.com/office/drawing/2014/main" id="{D19CFC54-BC66-4FD9-0FD3-B2890694D1BA}"/>
+          <p:cNvPr id="8" name="직사각형 7">
+            <a:extLst>
+              <a:ext uri="{FF2B5EF4-FFF2-40B4-BE49-F238E27FC236}">
+                <a16:creationId xmlns:a16="http://schemas.microsoft.com/office/drawing/2014/main" id="{CD509F7C-DD26-626D-8057-81F8D29CF798}"/>
               </a:ext>
             </a:extLst>
           </p:cNvPr>
@@ -16143,8 +20418,73 @@
         </p:nvSpPr>
         <p:spPr>
           <a:xfrm>
-            <a:off x="6950241" y="2789394"/>
+            <a:off x="6950618" y="2783043"/>
             <a:ext cx="868682" cy="880907"/>
+          </a:xfrm>
+          <a:prstGeom prst="rect">
+            <a:avLst/>
+          </a:prstGeom>
+          <a:solidFill>
+            <a:schemeClr val="accent6">
+              <a:lumMod val="20000"/>
+              <a:lumOff val="80000"/>
+            </a:schemeClr>
+          </a:solidFill>
+          <a:ln w="12700"/>
+        </p:spPr>
+        <p:style>
+          <a:lnRef idx="2">
+            <a:schemeClr val="accent1">
+              <a:shade val="15000"/>
+            </a:schemeClr>
+          </a:lnRef>
+          <a:fillRef idx="1">
+            <a:schemeClr val="accent1"/>
+          </a:fillRef>
+          <a:effectRef idx="0">
+            <a:schemeClr val="accent1"/>
+          </a:effectRef>
+          <a:fontRef idx="minor">
+            <a:schemeClr val="lt1"/>
+          </a:fontRef>
+        </p:style>
+        <p:txBody>
+          <a:bodyPr rtlCol="0" anchor="ctr"/>
+          <a:lstStyle/>
+          <a:p>
+            <a:pPr algn="ctr"/>
+            <a:r>
+              <a:rPr lang="en-US" altLang="ko-KR" sz="1600" dirty="0">
+                <a:solidFill>
+                  <a:sysClr val="windowText" lastClr="000000"/>
+                </a:solidFill>
+              </a:rPr>
+              <a:t>ACC</a:t>
+            </a:r>
+            <a:endParaRPr lang="ko-KR" altLang="en-US" sz="1600" dirty="0">
+              <a:solidFill>
+                <a:sysClr val="windowText" lastClr="000000"/>
+              </a:solidFill>
+            </a:endParaRPr>
+          </a:p>
+        </p:txBody>
+      </p:sp>
+      <p:sp>
+        <p:nvSpPr>
+          <p:cNvPr id="9" name="직사각형 8">
+            <a:extLst>
+              <a:ext uri="{FF2B5EF4-FFF2-40B4-BE49-F238E27FC236}">
+                <a16:creationId xmlns:a16="http://schemas.microsoft.com/office/drawing/2014/main" id="{60EE8360-D793-56B8-E23C-94E7823382A4}"/>
+              </a:ext>
+            </a:extLst>
+          </p:cNvPr>
+          <p:cNvSpPr/>
+          <p:nvPr/>
+        </p:nvSpPr>
+        <p:spPr>
+          <a:xfrm>
+            <a:off x="8025351" y="2783043"/>
+            <a:ext cx="921707" cy="880907"/>
           </a:xfrm>
           <a:prstGeom prst="rect">
             <a:avLst/>
@@ -16184,7 +20524,7 @@
                   <a:sysClr val="windowText" lastClr="000000"/>
                 </a:solidFill>
               </a:rPr>
-              <a:t>FPU_RF</a:t>
+              <a:t>ACC_R</a:t>
             </a:r>
             <a:endParaRPr lang="ko-KR" altLang="en-US" sz="1600" dirty="0">
               <a:solidFill>
@@ -16196,10 +20536,10 @@
       </p:sp>
       <p:sp>
         <p:nvSpPr>
-          <p:cNvPr id="8" name="직사각형 7">
-            <a:extLst>
-              <a:ext uri="{FF2B5EF4-FFF2-40B4-BE49-F238E27FC236}">
-                <a16:creationId xmlns:a16="http://schemas.microsoft.com/office/drawing/2014/main" id="{CD509F7C-DD26-626D-8057-81F8D29CF798}"/>
+          <p:cNvPr id="10" name="직사각형 9">
+            <a:extLst>
+              <a:ext uri="{FF2B5EF4-FFF2-40B4-BE49-F238E27FC236}">
+                <a16:creationId xmlns:a16="http://schemas.microsoft.com/office/drawing/2014/main" id="{7FA7260A-5731-5600-17B5-60F9704F8DC5}"/>
               </a:ext>
             </a:extLst>
           </p:cNvPr>
@@ -16208,138 +20548,8 @@
         </p:nvSpPr>
         <p:spPr>
           <a:xfrm>
-            <a:off x="8436054" y="2783043"/>
-            <a:ext cx="868682" cy="880907"/>
-          </a:xfrm>
-          <a:prstGeom prst="rect">
-            <a:avLst/>
-          </a:prstGeom>
-          <a:solidFill>
-            <a:schemeClr val="accent6">
-              <a:lumMod val="20000"/>
-              <a:lumOff val="80000"/>
-            </a:schemeClr>
-          </a:solidFill>
-          <a:ln w="12700"/>
-        </p:spPr>
-        <p:style>
-          <a:lnRef idx="2">
-            <a:schemeClr val="accent1">
-              <a:shade val="15000"/>
-            </a:schemeClr>
-          </a:lnRef>
-          <a:fillRef idx="1">
-            <a:schemeClr val="accent1"/>
-          </a:fillRef>
-          <a:effectRef idx="0">
-            <a:schemeClr val="accent1"/>
-          </a:effectRef>
-          <a:fontRef idx="minor">
-            <a:schemeClr val="lt1"/>
-          </a:fontRef>
-        </p:style>
-        <p:txBody>
-          <a:bodyPr rtlCol="0" anchor="ctr"/>
-          <a:lstStyle/>
-          <a:p>
-            <a:pPr algn="ctr"/>
-            <a:r>
-              <a:rPr lang="en-US" altLang="ko-KR" sz="1600" dirty="0">
-                <a:solidFill>
-                  <a:sysClr val="windowText" lastClr="000000"/>
-                </a:solidFill>
-              </a:rPr>
-              <a:t>ACC</a:t>
-            </a:r>
-            <a:endParaRPr lang="ko-KR" altLang="en-US" sz="1600" dirty="0">
-              <a:solidFill>
-                <a:sysClr val="windowText" lastClr="000000"/>
-              </a:solidFill>
-            </a:endParaRPr>
-          </a:p>
-        </p:txBody>
-      </p:sp>
-      <p:sp>
-        <p:nvSpPr>
-          <p:cNvPr id="9" name="직사각형 8">
-            <a:extLst>
-              <a:ext uri="{FF2B5EF4-FFF2-40B4-BE49-F238E27FC236}">
-                <a16:creationId xmlns:a16="http://schemas.microsoft.com/office/drawing/2014/main" id="{60EE8360-D793-56B8-E23C-94E7823382A4}"/>
-              </a:ext>
-            </a:extLst>
-          </p:cNvPr>
-          <p:cNvSpPr/>
-          <p:nvPr/>
-        </p:nvSpPr>
-        <p:spPr>
-          <a:xfrm>
-            <a:off x="9510787" y="2783043"/>
-            <a:ext cx="921707" cy="880907"/>
-          </a:xfrm>
-          <a:prstGeom prst="rect">
-            <a:avLst/>
-          </a:prstGeom>
-          <a:solidFill>
-            <a:schemeClr val="tx2">
-              <a:lumMod val="10000"/>
-              <a:lumOff val="90000"/>
-            </a:schemeClr>
-          </a:solidFill>
-          <a:ln w="12700"/>
-        </p:spPr>
-        <p:style>
-          <a:lnRef idx="2">
-            <a:schemeClr val="accent1">
-              <a:shade val="15000"/>
-            </a:schemeClr>
-          </a:lnRef>
-          <a:fillRef idx="1">
-            <a:schemeClr val="accent1"/>
-          </a:fillRef>
-          <a:effectRef idx="0">
-            <a:schemeClr val="accent1"/>
-          </a:effectRef>
-          <a:fontRef idx="minor">
-            <a:schemeClr val="lt1"/>
-          </a:fontRef>
-        </p:style>
-        <p:txBody>
-          <a:bodyPr rtlCol="0" anchor="ctr"/>
-          <a:lstStyle/>
-          <a:p>
-            <a:pPr algn="ctr"/>
-            <a:r>
-              <a:rPr lang="en-US" altLang="ko-KR" sz="1600" dirty="0">
-                <a:solidFill>
-                  <a:sysClr val="windowText" lastClr="000000"/>
-                </a:solidFill>
-              </a:rPr>
-              <a:t>ACC_R</a:t>
-            </a:r>
-            <a:endParaRPr lang="ko-KR" altLang="en-US" sz="1600" dirty="0">
-              <a:solidFill>
-                <a:sysClr val="windowText" lastClr="000000"/>
-              </a:solidFill>
-            </a:endParaRPr>
-          </a:p>
-        </p:txBody>
-      </p:sp>
-      <p:sp>
-        <p:nvSpPr>
-          <p:cNvPr id="10" name="직사각형 9">
-            <a:extLst>
-              <a:ext uri="{FF2B5EF4-FFF2-40B4-BE49-F238E27FC236}">
-                <a16:creationId xmlns:a16="http://schemas.microsoft.com/office/drawing/2014/main" id="{7FA7260A-5731-5600-17B5-60F9704F8DC5}"/>
-              </a:ext>
-            </a:extLst>
-          </p:cNvPr>
-          <p:cNvSpPr/>
-          <p:nvPr/>
-        </p:nvSpPr>
-        <p:spPr>
-          <a:xfrm>
-            <a:off x="4900927" y="4097495"/>
-            <a:ext cx="5531563" cy="516654"/>
+            <a:off x="4900928" y="4097495"/>
+            <a:ext cx="4823372" cy="516654"/>
           </a:xfrm>
           <a:prstGeom prst="rect">
             <a:avLst/>
@@ -16539,7 +20749,6 @@
           <p:cNvCxnSpPr>
             <a:cxnSpLocks/>
             <a:stCxn id="5" idx="3"/>
-            <a:endCxn id="7" idx="1"/>
           </p:cNvCxnSpPr>
           <p:nvPr/>
         </p:nvCxnSpPr>
@@ -16575,22 +20784,24 @@
       </p:cxnSp>
       <p:cxnSp>
         <p:nvCxnSpPr>
-          <p:cNvPr id="24" name="직선 화살표 연결선 23">
-            <a:extLst>
-              <a:ext uri="{FF2B5EF4-FFF2-40B4-BE49-F238E27FC236}">
-                <a16:creationId xmlns:a16="http://schemas.microsoft.com/office/drawing/2014/main" id="{5C305BE7-E253-A36F-A7C7-22F735AE8D2F}"/>
+          <p:cNvPr id="27" name="직선 화살표 연결선 26">
+            <a:extLst>
+              <a:ext uri="{FF2B5EF4-FFF2-40B4-BE49-F238E27FC236}">
+                <a16:creationId xmlns:a16="http://schemas.microsoft.com/office/drawing/2014/main" id="{1DC8D662-876E-A337-2100-4255D6D56E6D}"/>
               </a:ext>
             </a:extLst>
           </p:cNvPr>
           <p:cNvCxnSpPr>
             <a:cxnSpLocks/>
+            <a:stCxn id="8" idx="3"/>
+            <a:endCxn id="9" idx="1"/>
           </p:cNvCxnSpPr>
           <p:nvPr/>
         </p:nvCxnSpPr>
         <p:spPr>
           <a:xfrm>
-            <a:off x="7818921" y="3361379"/>
-            <a:ext cx="617131" cy="0"/>
+            <a:off x="7819300" y="3223497"/>
+            <a:ext cx="206051" cy="0"/>
           </a:xfrm>
           <a:prstGeom prst="straightConnector1">
             <a:avLst/>
@@ -16619,52 +20830,6 @@
       </p:cxnSp>
       <p:cxnSp>
         <p:nvCxnSpPr>
-          <p:cNvPr id="27" name="직선 화살표 연결선 26">
-            <a:extLst>
-              <a:ext uri="{FF2B5EF4-FFF2-40B4-BE49-F238E27FC236}">
-                <a16:creationId xmlns:a16="http://schemas.microsoft.com/office/drawing/2014/main" id="{1DC8D662-876E-A337-2100-4255D6D56E6D}"/>
-              </a:ext>
-            </a:extLst>
-          </p:cNvPr>
-          <p:cNvCxnSpPr>
-            <a:cxnSpLocks/>
-            <a:stCxn id="8" idx="3"/>
-            <a:endCxn id="9" idx="1"/>
-          </p:cNvCxnSpPr>
-          <p:nvPr/>
-        </p:nvCxnSpPr>
-        <p:spPr>
-          <a:xfrm>
-            <a:off x="9304736" y="3223497"/>
-            <a:ext cx="206051" cy="0"/>
-          </a:xfrm>
-          <a:prstGeom prst="straightConnector1">
-            <a:avLst/>
-          </a:prstGeom>
-          <a:ln w="12700">
-            <a:solidFill>
-              <a:schemeClr val="tx1"/>
-            </a:solidFill>
-            <a:tailEnd type="triangle"/>
-          </a:ln>
-        </p:spPr>
-        <p:style>
-          <a:lnRef idx="2">
-            <a:schemeClr val="accent1"/>
-          </a:lnRef>
-          <a:fillRef idx="0">
-            <a:schemeClr val="accent1"/>
-          </a:fillRef>
-          <a:effectRef idx="1">
-            <a:schemeClr val="accent1"/>
-          </a:effectRef>
-          <a:fontRef idx="minor">
-            <a:schemeClr val="tx1"/>
-          </a:fontRef>
-        </p:style>
-      </p:cxnSp>
-      <p:cxnSp>
-        <p:nvCxnSpPr>
           <p:cNvPr id="37" name="직선 화살표 연결선 36">
             <a:extLst>
               <a:ext uri="{FF2B5EF4-FFF2-40B4-BE49-F238E27FC236}">
@@ -16797,10 +20962,10 @@
       </p:cxnSp>
       <p:cxnSp>
         <p:nvCxnSpPr>
-          <p:cNvPr id="41" name="직선 화살표 연결선 40">
-            <a:extLst>
-              <a:ext uri="{FF2B5EF4-FFF2-40B4-BE49-F238E27FC236}">
-                <a16:creationId xmlns:a16="http://schemas.microsoft.com/office/drawing/2014/main" id="{2A20214F-EA22-B5B8-1928-5195C202E5D3}"/>
+          <p:cNvPr id="44" name="직선 화살표 연결선 43">
+            <a:extLst>
+              <a:ext uri="{FF2B5EF4-FFF2-40B4-BE49-F238E27FC236}">
+                <a16:creationId xmlns:a16="http://schemas.microsoft.com/office/drawing/2014/main" id="{75944C89-0F01-EF0F-0F2F-639C39669C1C}"/>
               </a:ext>
             </a:extLst>
           </p:cNvPr>
@@ -16810,8 +20975,8 @@
           <p:nvPr/>
         </p:nvCxnSpPr>
         <p:spPr>
-          <a:xfrm>
-            <a:off x="7546023" y="3670301"/>
+          <a:xfrm flipV="1">
+            <a:off x="7242718" y="3663950"/>
             <a:ext cx="0" cy="427194"/>
           </a:xfrm>
           <a:prstGeom prst="straightConnector1">
@@ -16839,94 +21004,6 @@
           </a:fontRef>
         </p:style>
       </p:cxnSp>
-      <p:cxnSp>
-        <p:nvCxnSpPr>
-          <p:cNvPr id="42" name="직선 화살표 연결선 41">
-            <a:extLst>
-              <a:ext uri="{FF2B5EF4-FFF2-40B4-BE49-F238E27FC236}">
-                <a16:creationId xmlns:a16="http://schemas.microsoft.com/office/drawing/2014/main" id="{E87E5B04-CF56-3BE7-57D7-B55D101B803C}"/>
-              </a:ext>
-            </a:extLst>
-          </p:cNvPr>
-          <p:cNvCxnSpPr>
-            <a:cxnSpLocks/>
-          </p:cNvCxnSpPr>
-          <p:nvPr/>
-        </p:nvCxnSpPr>
-        <p:spPr>
-          <a:xfrm flipV="1">
-            <a:off x="7253923" y="3670301"/>
-            <a:ext cx="0" cy="427194"/>
-          </a:xfrm>
-          <a:prstGeom prst="straightConnector1">
-            <a:avLst/>
-          </a:prstGeom>
-          <a:ln w="12700">
-            <a:solidFill>
-              <a:srgbClr val="0070C0"/>
-            </a:solidFill>
-            <a:tailEnd type="triangle"/>
-          </a:ln>
-        </p:spPr>
-        <p:style>
-          <a:lnRef idx="2">
-            <a:schemeClr val="accent1"/>
-          </a:lnRef>
-          <a:fillRef idx="0">
-            <a:schemeClr val="accent1"/>
-          </a:fillRef>
-          <a:effectRef idx="1">
-            <a:schemeClr val="accent1"/>
-          </a:effectRef>
-          <a:fontRef idx="minor">
-            <a:schemeClr val="tx1"/>
-          </a:fontRef>
-        </p:style>
-      </p:cxnSp>
-      <p:cxnSp>
-        <p:nvCxnSpPr>
-          <p:cNvPr id="44" name="직선 화살표 연결선 43">
-            <a:extLst>
-              <a:ext uri="{FF2B5EF4-FFF2-40B4-BE49-F238E27FC236}">
-                <a16:creationId xmlns:a16="http://schemas.microsoft.com/office/drawing/2014/main" id="{75944C89-0F01-EF0F-0F2F-639C39669C1C}"/>
-              </a:ext>
-            </a:extLst>
-          </p:cNvPr>
-          <p:cNvCxnSpPr>
-            <a:cxnSpLocks/>
-          </p:cNvCxnSpPr>
-          <p:nvPr/>
-        </p:nvCxnSpPr>
-        <p:spPr>
-          <a:xfrm flipV="1">
-            <a:off x="8728154" y="3663950"/>
-            <a:ext cx="0" cy="427194"/>
-          </a:xfrm>
-          <a:prstGeom prst="straightConnector1">
-            <a:avLst/>
-          </a:prstGeom>
-          <a:ln w="12700">
-            <a:solidFill>
-              <a:srgbClr val="0070C0"/>
-            </a:solidFill>
-            <a:tailEnd type="triangle"/>
-          </a:ln>
-        </p:spPr>
-        <p:style>
-          <a:lnRef idx="2">
-            <a:schemeClr val="accent1"/>
-          </a:lnRef>
-          <a:fillRef idx="0">
-            <a:schemeClr val="accent1"/>
-          </a:fillRef>
-          <a:effectRef idx="1">
-            <a:schemeClr val="accent1"/>
-          </a:effectRef>
-          <a:fontRef idx="minor">
-            <a:schemeClr val="tx1"/>
-          </a:fontRef>
-        </p:style>
-      </p:cxnSp>
       <p:sp>
         <p:nvSpPr>
           <p:cNvPr id="48" name="직사각형 47">
@@ -16941,7 +21018,7 @@
         </p:nvSpPr>
         <p:spPr>
           <a:xfrm>
-            <a:off x="10644586" y="2783042"/>
+            <a:off x="9159150" y="2783042"/>
             <a:ext cx="565150" cy="880907"/>
           </a:xfrm>
           <a:prstGeom prst="rect">
@@ -17008,7 +21085,7 @@
         </p:nvCxnSpPr>
         <p:spPr>
           <a:xfrm>
-            <a:off x="10117534" y="3663949"/>
+            <a:off x="8632098" y="3663949"/>
             <a:ext cx="0" cy="427194"/>
           </a:xfrm>
           <a:prstGeom prst="straightConnector1">
@@ -17052,7 +21129,7 @@
         </p:nvCxnSpPr>
         <p:spPr>
           <a:xfrm flipV="1">
-            <a:off x="9825434" y="3663949"/>
+            <a:off x="8339998" y="3663949"/>
             <a:ext cx="0" cy="427194"/>
           </a:xfrm>
           <a:prstGeom prst="straightConnector1">
@@ -17098,7 +21175,7 @@
         </p:nvCxnSpPr>
         <p:spPr>
           <a:xfrm flipV="1">
-            <a:off x="10432494" y="3223496"/>
+            <a:off x="8947058" y="3223496"/>
             <a:ext cx="212092" cy="1"/>
           </a:xfrm>
           <a:prstGeom prst="straightConnector1">
@@ -17398,8 +21475,8 @@
         </p:nvCxnSpPr>
         <p:spPr>
           <a:xfrm rot="16200000" flipH="1">
-            <a:off x="3775529" y="3230424"/>
-            <a:ext cx="691872" cy="1558924"/>
+            <a:off x="3775529" y="3230423"/>
+            <a:ext cx="691872" cy="1558925"/>
           </a:xfrm>
           <a:prstGeom prst="bentConnector2">
             <a:avLst/>
@@ -17500,80 +21577,6 @@
           </a:p>
         </p:txBody>
       </p:sp>
-      <p:sp>
-        <p:nvSpPr>
-          <p:cNvPr id="20" name="TextBox 19">
-            <a:extLst>
-              <a:ext uri="{FF2B5EF4-FFF2-40B4-BE49-F238E27FC236}">
-                <a16:creationId xmlns:a16="http://schemas.microsoft.com/office/drawing/2014/main" id="{1569F635-B713-9DF1-AF03-02D595C55201}"/>
-              </a:ext>
-            </a:extLst>
-          </p:cNvPr>
-          <p:cNvSpPr txBox="1"/>
-          <p:nvPr/>
-        </p:nvSpPr>
-        <p:spPr>
-          <a:xfrm>
-            <a:off x="6824347" y="3757094"/>
-            <a:ext cx="585468" cy="246221"/>
-          </a:xfrm>
-          <a:prstGeom prst="rect">
-            <a:avLst/>
-          </a:prstGeom>
-          <a:noFill/>
-        </p:spPr>
-        <p:txBody>
-          <a:bodyPr wrap="square" rtlCol="0">
-            <a:spAutoFit/>
-          </a:bodyPr>
-          <a:lstStyle/>
-          <a:p>
-            <a:pPr algn="ctr"/>
-            <a:r>
-              <a:rPr lang="en-US" altLang="ko-KR" sz="1000" dirty="0"/>
-              <a:t>wen</a:t>
-            </a:r>
-            <a:endParaRPr lang="ko-KR" altLang="en-US" sz="1000" dirty="0"/>
-          </a:p>
-        </p:txBody>
-      </p:sp>
-      <p:sp>
-        <p:nvSpPr>
-          <p:cNvPr id="22" name="TextBox 21">
-            <a:extLst>
-              <a:ext uri="{FF2B5EF4-FFF2-40B4-BE49-F238E27FC236}">
-                <a16:creationId xmlns:a16="http://schemas.microsoft.com/office/drawing/2014/main" id="{A3FAC70E-5D1C-F75C-4AF7-F638D24FDB59}"/>
-              </a:ext>
-            </a:extLst>
-          </p:cNvPr>
-          <p:cNvSpPr txBox="1"/>
-          <p:nvPr/>
-        </p:nvSpPr>
-        <p:spPr>
-          <a:xfrm>
-            <a:off x="7426639" y="3753780"/>
-            <a:ext cx="585468" cy="246221"/>
-          </a:xfrm>
-          <a:prstGeom prst="rect">
-            <a:avLst/>
-          </a:prstGeom>
-          <a:noFill/>
-        </p:spPr>
-        <p:txBody>
-          <a:bodyPr wrap="square" rtlCol="0">
-            <a:spAutoFit/>
-          </a:bodyPr>
-          <a:lstStyle/>
-          <a:p>
-            <a:pPr algn="ctr"/>
-            <a:r>
-              <a:rPr lang="en-US" altLang="ko-KR" sz="1000" dirty="0"/>
-              <a:t>valid</a:t>
-            </a:r>
-            <a:endParaRPr lang="ko-KR" altLang="en-US" sz="1000" dirty="0"/>
-          </a:p>
-        </p:txBody>
-      </p:sp>
       <p:cxnSp>
         <p:nvCxnSpPr>
           <p:cNvPr id="26" name="직선 화살표 연결선 25">
@@ -17590,7 +21593,7 @@
         </p:nvCxnSpPr>
         <p:spPr>
           <a:xfrm>
-            <a:off x="9008350" y="3663949"/>
+            <a:off x="7522914" y="3663949"/>
             <a:ext cx="0" cy="427194"/>
           </a:xfrm>
           <a:prstGeom prst="straightConnector1">
@@ -17620,10 +21623,10 @@
       </p:cxnSp>
       <p:sp>
         <p:nvSpPr>
-          <p:cNvPr id="33" name="TextBox 32">
-            <a:extLst>
-              <a:ext uri="{FF2B5EF4-FFF2-40B4-BE49-F238E27FC236}">
-                <a16:creationId xmlns:a16="http://schemas.microsoft.com/office/drawing/2014/main" id="{7F4E67B0-17E9-A807-A20D-FCF2806E5FFB}"/>
+          <p:cNvPr id="35" name="TextBox 34">
+            <a:extLst>
+              <a:ext uri="{FF2B5EF4-FFF2-40B4-BE49-F238E27FC236}">
+                <a16:creationId xmlns:a16="http://schemas.microsoft.com/office/drawing/2014/main" id="{A2DCBC39-E47F-6CB1-EA37-0E34AEBE0283}"/>
               </a:ext>
             </a:extLst>
           </p:cNvPr>
@@ -17632,7 +21635,7 @@
         </p:nvSpPr>
         <p:spPr>
           <a:xfrm>
-            <a:off x="7834753" y="2898385"/>
+            <a:off x="7397743" y="3743093"/>
             <a:ext cx="585468" cy="246221"/>
           </a:xfrm>
           <a:prstGeom prst="rect">
@@ -17649,7 +21652,7 @@
             <a:pPr algn="ctr"/>
             <a:r>
               <a:rPr lang="en-US" altLang="ko-KR" sz="1000" dirty="0"/>
-              <a:t>select</a:t>
+              <a:t>done</a:t>
             </a:r>
             <a:endParaRPr lang="ko-KR" altLang="en-US" sz="1000" dirty="0"/>
           </a:p>
@@ -17657,10 +21660,10 @@
       </p:sp>
       <p:sp>
         <p:nvSpPr>
-          <p:cNvPr id="35" name="TextBox 34">
-            <a:extLst>
-              <a:ext uri="{FF2B5EF4-FFF2-40B4-BE49-F238E27FC236}">
-                <a16:creationId xmlns:a16="http://schemas.microsoft.com/office/drawing/2014/main" id="{A2DCBC39-E47F-6CB1-EA37-0E34AEBE0283}"/>
+          <p:cNvPr id="36" name="TextBox 35">
+            <a:extLst>
+              <a:ext uri="{FF2B5EF4-FFF2-40B4-BE49-F238E27FC236}">
+                <a16:creationId xmlns:a16="http://schemas.microsoft.com/office/drawing/2014/main" id="{14875F28-8636-66AD-BC2B-7AC9FFF86DEB}"/>
               </a:ext>
             </a:extLst>
           </p:cNvPr>
@@ -17669,8 +21672,8 @@
         </p:nvSpPr>
         <p:spPr>
           <a:xfrm>
-            <a:off x="8883179" y="3743093"/>
-            <a:ext cx="585468" cy="246221"/>
+            <a:off x="7874069" y="3677491"/>
+            <a:ext cx="585468" cy="400110"/>
           </a:xfrm>
           <a:prstGeom prst="rect">
             <a:avLst/>
@@ -17686,7 +21689,14 @@
             <a:pPr algn="ctr"/>
             <a:r>
               <a:rPr lang="en-US" altLang="ko-KR" sz="1000" dirty="0"/>
-              <a:t>done</a:t>
+              <a:t>wen</a:t>
+            </a:r>
+          </a:p>
+          <a:p>
+            <a:pPr algn="ctr"/>
+            <a:r>
+              <a:rPr lang="en-US" altLang="ko-KR" sz="1000" dirty="0"/>
+              <a:t>mode</a:t>
             </a:r>
             <a:endParaRPr lang="ko-KR" altLang="en-US" sz="1000" dirty="0"/>
           </a:p>
@@ -17694,10 +21704,10 @@
       </p:sp>
       <p:sp>
         <p:nvSpPr>
-          <p:cNvPr id="36" name="TextBox 35">
-            <a:extLst>
-              <a:ext uri="{FF2B5EF4-FFF2-40B4-BE49-F238E27FC236}">
-                <a16:creationId xmlns:a16="http://schemas.microsoft.com/office/drawing/2014/main" id="{14875F28-8636-66AD-BC2B-7AC9FFF86DEB}"/>
+          <p:cNvPr id="46" name="TextBox 45">
+            <a:extLst>
+              <a:ext uri="{FF2B5EF4-FFF2-40B4-BE49-F238E27FC236}">
+                <a16:creationId xmlns:a16="http://schemas.microsoft.com/office/drawing/2014/main" id="{4393032B-2790-1737-66F6-822470D9C28E}"/>
               </a:ext>
             </a:extLst>
           </p:cNvPr>
@@ -17706,8 +21716,8 @@
         </p:nvSpPr>
         <p:spPr>
           <a:xfrm>
-            <a:off x="9359505" y="3677491"/>
-            <a:ext cx="585468" cy="400110"/>
+            <a:off x="8511926" y="3747427"/>
+            <a:ext cx="585468" cy="246221"/>
           </a:xfrm>
           <a:prstGeom prst="rect">
             <a:avLst/>
@@ -17723,14 +21733,7 @@
             <a:pPr algn="ctr"/>
             <a:r>
               <a:rPr lang="en-US" altLang="ko-KR" sz="1000" dirty="0"/>
-              <a:t>wen</a:t>
-            </a:r>
-          </a:p>
-          <a:p>
-            <a:pPr algn="ctr"/>
-            <a:r>
-              <a:rPr lang="en-US" altLang="ko-KR" sz="1000" dirty="0"/>
-              <a:t>mode</a:t>
+              <a:t>valid</a:t>
             </a:r>
             <a:endParaRPr lang="ko-KR" altLang="en-US" sz="1000" dirty="0"/>
           </a:p>
@@ -17738,10 +21741,10 @@
       </p:sp>
       <p:sp>
         <p:nvSpPr>
-          <p:cNvPr id="46" name="TextBox 45">
-            <a:extLst>
-              <a:ext uri="{FF2B5EF4-FFF2-40B4-BE49-F238E27FC236}">
-                <a16:creationId xmlns:a16="http://schemas.microsoft.com/office/drawing/2014/main" id="{4393032B-2790-1737-66F6-822470D9C28E}"/>
+          <p:cNvPr id="47" name="TextBox 46">
+            <a:extLst>
+              <a:ext uri="{FF2B5EF4-FFF2-40B4-BE49-F238E27FC236}">
+                <a16:creationId xmlns:a16="http://schemas.microsoft.com/office/drawing/2014/main" id="{005FA58A-3968-94FE-B6A1-1FBA06C580EB}"/>
               </a:ext>
             </a:extLst>
           </p:cNvPr>
@@ -17750,8 +21753,8 @@
         </p:nvSpPr>
         <p:spPr>
           <a:xfrm>
-            <a:off x="9997362" y="3747427"/>
-            <a:ext cx="585468" cy="246221"/>
+            <a:off x="2017947" y="686326"/>
+            <a:ext cx="4402459" cy="430887"/>
           </a:xfrm>
           <a:prstGeom prst="rect">
             <a:avLst/>
@@ -17764,21 +21767,83 @@
           </a:bodyPr>
           <a:lstStyle/>
           <a:p>
-            <a:pPr algn="ctr"/>
-            <a:r>
-              <a:rPr lang="en-US" altLang="ko-KR" sz="1000" dirty="0"/>
-              <a:t>valid</a:t>
-            </a:r>
-            <a:endParaRPr lang="ko-KR" altLang="en-US" sz="1000" dirty="0"/>
+            <a:r>
+              <a:rPr lang="en-US" altLang="ko-KR" sz="1100" dirty="0"/>
+              <a:t>READ_RESULT </a:t>
+            </a:r>
+            <a:r>
+              <a:rPr lang="ko-KR" altLang="en-US" sz="1100" dirty="0"/>
+              <a:t>끝나면 </a:t>
+            </a:r>
+            <a:r>
+              <a:rPr lang="en-US" altLang="ko-KR" sz="1100" dirty="0"/>
+              <a:t>weight</a:t>
+            </a:r>
+            <a:r>
+              <a:rPr lang="ko-KR" altLang="en-US" sz="1100" dirty="0"/>
+              <a:t> </a:t>
+            </a:r>
+            <a:r>
+              <a:rPr lang="en-US" altLang="ko-KR" sz="1100" dirty="0"/>
+              <a:t>RF</a:t>
+            </a:r>
+            <a:r>
+              <a:rPr lang="ko-KR" altLang="en-US" sz="1100" dirty="0"/>
+              <a:t> 제외 </a:t>
+            </a:r>
+            <a:endParaRPr lang="en-US" altLang="ko-KR" sz="1100" dirty="0"/>
+          </a:p>
+          <a:p>
+            <a:r>
+              <a:rPr lang="ko-KR" altLang="en-US" sz="1100" dirty="0"/>
+              <a:t>모든 </a:t>
+            </a:r>
+            <a:r>
+              <a:rPr lang="en-US" altLang="ko-KR" sz="1100" dirty="0"/>
+              <a:t>block</a:t>
+            </a:r>
+            <a:r>
+              <a:rPr lang="ko-KR" altLang="en-US" sz="1100" dirty="0"/>
+              <a:t>에</a:t>
+            </a:r>
+            <a:r>
+              <a:rPr lang="en-US" altLang="ko-KR" sz="1100" dirty="0"/>
+              <a:t> valid/done signal</a:t>
+            </a:r>
+            <a:r>
+              <a:rPr lang="ko-KR" altLang="en-US" sz="1100" dirty="0"/>
+              <a:t>과 </a:t>
+            </a:r>
+            <a:r>
+              <a:rPr lang="en-US" altLang="ko-KR" sz="1100" dirty="0"/>
+              <a:t>ACC </a:t>
+            </a:r>
+            <a:r>
+              <a:rPr lang="ko-KR" altLang="en-US" sz="1100" dirty="0"/>
+              <a:t>초기화 </a:t>
+            </a:r>
+            <a:r>
+              <a:rPr lang="en-US" altLang="ko-KR" sz="1100" dirty="0"/>
+              <a:t>signal </a:t>
+            </a:r>
+            <a:r>
+              <a:rPr lang="ko-KR" altLang="en-US" sz="1100" dirty="0"/>
+              <a:t>보냄</a:t>
+            </a:r>
+            <a:r>
+              <a:rPr lang="en-US" altLang="ko-KR" sz="1100" dirty="0"/>
+              <a:t>.</a:t>
+            </a:r>
+            <a:endParaRPr lang="ko-KR" altLang="en-US" sz="1100" dirty="0"/>
           </a:p>
         </p:txBody>
       </p:sp>
       <p:sp>
         <p:nvSpPr>
-          <p:cNvPr id="47" name="TextBox 46">
-            <a:extLst>
-              <a:ext uri="{FF2B5EF4-FFF2-40B4-BE49-F238E27FC236}">
-                <a16:creationId xmlns:a16="http://schemas.microsoft.com/office/drawing/2014/main" id="{005FA58A-3968-94FE-B6A1-1FBA06C580EB}"/>
+          <p:cNvPr id="53" name="TextBox 52">
+            <a:extLst>
+              <a:ext uri="{FF2B5EF4-FFF2-40B4-BE49-F238E27FC236}">
+                <a16:creationId xmlns:a16="http://schemas.microsoft.com/office/drawing/2014/main" id="{AA6E70A4-37BC-F7DB-AFF3-5F0C5FC11510}"/>
               </a:ext>
             </a:extLst>
           </p:cNvPr>
@@ -17787,8 +21852,8 @@
         </p:nvSpPr>
         <p:spPr>
           <a:xfrm>
-            <a:off x="2017947" y="686326"/>
-            <a:ext cx="4402459" cy="430887"/>
+            <a:off x="2141054" y="2969582"/>
+            <a:ext cx="1123634" cy="261610"/>
           </a:xfrm>
           <a:prstGeom prst="rect">
             <a:avLst/>
@@ -17801,72 +21866,10 @@
           </a:bodyPr>
           <a:lstStyle/>
           <a:p>
+            <a:pPr algn="ctr"/>
             <a:r>
               <a:rPr lang="en-US" altLang="ko-KR" sz="1100" dirty="0"/>
-              <a:t>READ_RESULT </a:t>
-            </a:r>
-            <a:r>
-              <a:rPr lang="ko-KR" altLang="en-US" sz="1100" dirty="0"/>
-              <a:t>끝나면 </a:t>
-            </a:r>
-            <a:r>
-              <a:rPr lang="en-US" altLang="ko-KR" sz="1100" dirty="0"/>
-              <a:t>weight</a:t>
-            </a:r>
-            <a:r>
-              <a:rPr lang="ko-KR" altLang="en-US" sz="1100" dirty="0"/>
-              <a:t> </a:t>
-            </a:r>
-            <a:r>
-              <a:rPr lang="en-US" altLang="ko-KR" sz="1100" dirty="0"/>
-              <a:t>RF</a:t>
-            </a:r>
-            <a:r>
-              <a:rPr lang="ko-KR" altLang="en-US" sz="1100" dirty="0"/>
-              <a:t> 제외 </a:t>
-            </a:r>
-            <a:endParaRPr lang="en-US" altLang="ko-KR" sz="1100" dirty="0"/>
-          </a:p>
-          <a:p>
-            <a:r>
-              <a:rPr lang="ko-KR" altLang="en-US" sz="1100" dirty="0"/>
-              <a:t>모든 </a:t>
-            </a:r>
-            <a:r>
-              <a:rPr lang="en-US" altLang="ko-KR" sz="1100" dirty="0"/>
-              <a:t>block</a:t>
-            </a:r>
-            <a:r>
-              <a:rPr lang="ko-KR" altLang="en-US" sz="1100" dirty="0"/>
-              <a:t>에</a:t>
-            </a:r>
-            <a:r>
-              <a:rPr lang="en-US" altLang="ko-KR" sz="1100" dirty="0"/>
-              <a:t> valid/done signal</a:t>
-            </a:r>
-            <a:r>
-              <a:rPr lang="ko-KR" altLang="en-US" sz="1100" dirty="0"/>
-              <a:t>과 </a:t>
-            </a:r>
-            <a:r>
-              <a:rPr lang="en-US" altLang="ko-KR" sz="1100" dirty="0"/>
-              <a:t>ACC </a:t>
-            </a:r>
-            <a:r>
-              <a:rPr lang="ko-KR" altLang="en-US" sz="1100" dirty="0"/>
-              <a:t>초기화 </a:t>
-            </a:r>
-            <a:r>
-              <a:rPr lang="en-US" altLang="ko-KR" sz="1100" dirty="0"/>
-              <a:t>signal </a:t>
-            </a:r>
-            <a:r>
-              <a:rPr lang="ko-KR" altLang="en-US" sz="1100" dirty="0"/>
-              <a:t>보냄</a:t>
-            </a:r>
-            <a:r>
-              <a:rPr lang="en-US" altLang="ko-KR" sz="1100" dirty="0"/>
-              <a:t>.</a:t>
+              <a:t>valid</a:t>
             </a:r>
             <a:endParaRPr lang="ko-KR" altLang="en-US" sz="1100" dirty="0"/>
           </a:p>
@@ -17874,10 +21877,10 @@
       </p:sp>
       <p:sp>
         <p:nvSpPr>
-          <p:cNvPr id="53" name="TextBox 52">
-            <a:extLst>
-              <a:ext uri="{FF2B5EF4-FFF2-40B4-BE49-F238E27FC236}">
-                <a16:creationId xmlns:a16="http://schemas.microsoft.com/office/drawing/2014/main" id="{AA6E70A4-37BC-F7DB-AFF3-5F0C5FC11510}"/>
+          <p:cNvPr id="39" name="TextBox 38">
+            <a:extLst>
+              <a:ext uri="{FF2B5EF4-FFF2-40B4-BE49-F238E27FC236}">
+                <a16:creationId xmlns:a16="http://schemas.microsoft.com/office/drawing/2014/main" id="{403508A2-B5F4-5FAF-0BEE-8F509ADF691A}"/>
               </a:ext>
             </a:extLst>
           </p:cNvPr>
@@ -17886,88 +21889,7 @@
         </p:nvSpPr>
         <p:spPr>
           <a:xfrm>
-            <a:off x="2141054" y="2969582"/>
-            <a:ext cx="1123634" cy="261610"/>
-          </a:xfrm>
-          <a:prstGeom prst="rect">
-            <a:avLst/>
-          </a:prstGeom>
-          <a:noFill/>
-        </p:spPr>
-        <p:txBody>
-          <a:bodyPr wrap="square" rtlCol="0">
-            <a:spAutoFit/>
-          </a:bodyPr>
-          <a:lstStyle/>
-          <a:p>
-            <a:pPr algn="ctr"/>
-            <a:r>
-              <a:rPr lang="en-US" altLang="ko-KR" sz="1100" dirty="0"/>
-              <a:t>valid</a:t>
-            </a:r>
-            <a:endParaRPr lang="ko-KR" altLang="en-US" sz="1100" dirty="0"/>
-          </a:p>
-        </p:txBody>
-      </p:sp>
-      <p:cxnSp>
-        <p:nvCxnSpPr>
-          <p:cNvPr id="34" name="직선 화살표 연결선 33">
-            <a:extLst>
-              <a:ext uri="{FF2B5EF4-FFF2-40B4-BE49-F238E27FC236}">
-                <a16:creationId xmlns:a16="http://schemas.microsoft.com/office/drawing/2014/main" id="{6B6E830F-4C40-5050-7B50-52B1D007A649}"/>
-              </a:ext>
-            </a:extLst>
-          </p:cNvPr>
-          <p:cNvCxnSpPr>
-            <a:cxnSpLocks/>
-          </p:cNvCxnSpPr>
-          <p:nvPr/>
-        </p:nvCxnSpPr>
-        <p:spPr>
-          <a:xfrm flipH="1">
-            <a:off x="7818922" y="3108324"/>
-            <a:ext cx="617131" cy="0"/>
-          </a:xfrm>
-          <a:prstGeom prst="straightConnector1">
-            <a:avLst/>
-          </a:prstGeom>
-          <a:ln w="12700">
-            <a:solidFill>
-              <a:schemeClr val="tx1"/>
-            </a:solidFill>
-            <a:tailEnd type="triangle"/>
-          </a:ln>
-        </p:spPr>
-        <p:style>
-          <a:lnRef idx="2">
-            <a:schemeClr val="accent1"/>
-          </a:lnRef>
-          <a:fillRef idx="0">
-            <a:schemeClr val="accent1"/>
-          </a:fillRef>
-          <a:effectRef idx="1">
-            <a:schemeClr val="accent1"/>
-          </a:effectRef>
-          <a:fontRef idx="minor">
-            <a:schemeClr val="tx1"/>
-          </a:fontRef>
-        </p:style>
-      </p:cxnSp>
-      <p:sp>
-        <p:nvSpPr>
-          <p:cNvPr id="39" name="TextBox 38">
-            <a:extLst>
-              <a:ext uri="{FF2B5EF4-FFF2-40B4-BE49-F238E27FC236}">
-                <a16:creationId xmlns:a16="http://schemas.microsoft.com/office/drawing/2014/main" id="{403508A2-B5F4-5FAF-0BEE-8F509ADF691A}"/>
-              </a:ext>
-            </a:extLst>
-          </p:cNvPr>
-          <p:cNvSpPr txBox="1"/>
-          <p:nvPr/>
-        </p:nvSpPr>
-        <p:spPr>
-          <a:xfrm>
-            <a:off x="8275798" y="3779292"/>
+            <a:off x="6790362" y="3779292"/>
             <a:ext cx="585468" cy="246221"/>
           </a:xfrm>
           <a:prstGeom prst="rect">
@@ -18003,7 +21925,7 @@
 </p:sld>
 </file>
 
-<file path=ppt/slides/slide4.xml><?xml version="1.0" encoding="utf-8"?>
+<file path=ppt/slides/slide5.xml><?xml version="1.0" encoding="utf-8"?>
 <p:sld xmlns:a="http://schemas.openxmlformats.org/drawingml/2006/main" xmlns:r="http://schemas.openxmlformats.org/officeDocument/2006/relationships" xmlns:p="http://schemas.openxmlformats.org/presentationml/2006/main">
   <p:cSld>
     <p:spTree>
